--- a/slides/techmeeting.pptx
+++ b/slides/techmeeting.pptx
@@ -21,7 +21,6 @@
     <p:sldId id="266" r:id="rId14"/>
     <p:sldId id="267" r:id="rId15"/>
     <p:sldId id="268" r:id="rId16"/>
-    <p:sldId id="269" r:id="rId17"/>
   </p:sldIdLst>
   <p:sldSz cx="9144000" cy="5143500"/>
   <p:notesSz cx="6858000" cy="9144000"/>
@@ -352,7 +351,7 @@
             <a:pPr indent="0" algn="r">
               <a:buNone/>
             </a:pPr>
-            <a:fld id="{3DD675DC-23D9-4BB9-A20E-5B0044F48FA9}" type="slidenum">
+            <a:fld id="{6034E287-F818-4C21-A027-FAB3064A0A71}" type="slidenum">
               <a:rPr b="0" lang="en-US" sz="1400" spc="-1" strike="noStrike">
                 <a:solidFill>
                   <a:srgbClr val="000000"/>
@@ -395,7 +394,7 @@
       </p:grpSpPr>
       <p:sp>
         <p:nvSpPr>
-          <p:cNvPr id="75" name="PlaceHolder 1"/>
+          <p:cNvPr id="73" name="PlaceHolder 1"/>
           <p:cNvSpPr>
             <a:spLocks noGrp="1"/>
           </p:cNvSpPr>
@@ -418,7 +417,7 @@
       </p:sp>
       <p:sp>
         <p:nvSpPr>
-          <p:cNvPr id="76" name="PlaceHolder 2"/>
+          <p:cNvPr id="74" name="PlaceHolder 2"/>
           <p:cNvSpPr>
             <a:spLocks noGrp="1"/>
           </p:cNvSpPr>
@@ -429,7 +428,7 @@
         <p:spPr>
           <a:xfrm>
             <a:off x="756000" y="5078520"/>
-            <a:ext cx="6046200" cy="4809600"/>
+            <a:ext cx="6045480" cy="4808880"/>
           </a:xfrm>
           <a:prstGeom prst="rect">
             <a:avLst/>
@@ -549,7 +548,7 @@
 </p:notes>
 </file>
 
-<file path=ppt/notesSlides/notesSlide11.xml><?xml version="1.0" encoding="utf-8"?>
+<file path=ppt/notesSlides/notesSlide10.xml><?xml version="1.0" encoding="utf-8"?>
 <p:notes xmlns:a="http://schemas.openxmlformats.org/drawingml/2006/main" xmlns:p="http://schemas.openxmlformats.org/presentationml/2006/main" xmlns:r="http://schemas.openxmlformats.org/officeDocument/2006/relationships" xmlns:p14="http://schemas.microsoft.com/office/powerpoint/2010/main" xmlns:p15="http://schemas.microsoft.com/office/powerpoint/2012/main" xmlns:mc="http://schemas.openxmlformats.org/markup-compatibility/2006">
   <p:cSld>
     <p:spTree>
@@ -568,7 +567,7 @@
       </p:grpSpPr>
       <p:sp>
         <p:nvSpPr>
-          <p:cNvPr id="83" name="PlaceHolder 1"/>
+          <p:cNvPr id="81" name="PlaceHolder 1"/>
           <p:cNvSpPr>
             <a:spLocks noGrp="1"/>
           </p:cNvSpPr>
@@ -591,7 +590,7 @@
       </p:sp>
       <p:sp>
         <p:nvSpPr>
-          <p:cNvPr id="84" name="PlaceHolder 2"/>
+          <p:cNvPr id="82" name="PlaceHolder 2"/>
           <p:cNvSpPr>
             <a:spLocks noGrp="1"/>
           </p:cNvSpPr>
@@ -602,7 +601,7 @@
         <p:spPr>
           <a:xfrm>
             <a:off x="756000" y="5078520"/>
-            <a:ext cx="6046920" cy="4810320"/>
+            <a:ext cx="6046200" cy="4809600"/>
           </a:xfrm>
           <a:prstGeom prst="rect">
             <a:avLst/>
@@ -631,7 +630,7 @@
       </p:sp>
       <p:sp>
         <p:nvSpPr>
-          <p:cNvPr id="85" name="PlaceHolder 3"/>
+          <p:cNvPr id="83" name="PlaceHolder 3"/>
           <p:cNvSpPr>
             <a:spLocks noGrp="1"/>
           </p:cNvSpPr>
@@ -642,7 +641,7 @@
         <p:spPr>
           <a:xfrm>
             <a:off x="4278960" y="10157400"/>
-            <a:ext cx="3279960" cy="533520"/>
+            <a:ext cx="3279240" cy="532800"/>
           </a:xfrm>
           <a:prstGeom prst="rect">
             <a:avLst/>
@@ -683,7 +682,180 @@
                 <a:tab algn="l" pos="0"/>
               </a:tabLst>
             </a:pPr>
-            <a:fld id="{11DEBFA6-9DC6-4395-8FB4-0E80B04B33A8}" type="slidenum">
+            <a:fld id="{2D3DD49A-1B9B-4330-B3E7-B6F299E2110D}" type="slidenum">
+              <a:rPr b="0" lang="en-US" sz="1400" spc="-1" strike="noStrike">
+                <a:solidFill>
+                  <a:srgbClr val="000000"/>
+                </a:solidFill>
+                <a:latin typeface="Times New Roman"/>
+              </a:rPr>
+              <a:t>&lt;number&gt;</a:t>
+            </a:fld>
+            <a:endParaRPr b="0" lang="en-US" sz="1400" spc="-1" strike="noStrike">
+              <a:solidFill>
+                <a:srgbClr val="000000"/>
+              </a:solidFill>
+              <a:latin typeface="Times New Roman"/>
+            </a:endParaRPr>
+          </a:p>
+        </p:txBody>
+      </p:sp>
+    </p:spTree>
+  </p:cSld>
+</p:notes>
+</file>
+
+<file path=ppt/notesSlides/notesSlide11.xml><?xml version="1.0" encoding="utf-8"?>
+<p:notes xmlns:a="http://schemas.openxmlformats.org/drawingml/2006/main" xmlns:p="http://schemas.openxmlformats.org/presentationml/2006/main" xmlns:r="http://schemas.openxmlformats.org/officeDocument/2006/relationships" xmlns:p14="http://schemas.microsoft.com/office/powerpoint/2010/main" xmlns:p15="http://schemas.microsoft.com/office/powerpoint/2012/main" xmlns:mc="http://schemas.openxmlformats.org/markup-compatibility/2006">
+  <p:cSld>
+    <p:spTree>
+      <p:nvGrpSpPr>
+        <p:cNvPr id="1" name=""/>
+        <p:cNvGrpSpPr/>
+        <p:nvPr/>
+      </p:nvGrpSpPr>
+      <p:grpSpPr>
+        <a:xfrm>
+          <a:off x="0" y="0"/>
+          <a:ext cx="0" cy="0"/>
+          <a:chOff x="0" y="0"/>
+          <a:chExt cx="0" cy="0"/>
+        </a:xfrm>
+      </p:grpSpPr>
+      <p:sp>
+        <p:nvSpPr>
+          <p:cNvPr id="84" name="PlaceHolder 1"/>
+          <p:cNvSpPr>
+            <a:spLocks noGrp="1"/>
+          </p:cNvSpPr>
+          <p:nvPr>
+            <p:ph type="sldImg"/>
+          </p:nvPr>
+        </p:nvSpPr>
+        <p:spPr>
+          <a:xfrm>
+            <a:off x="0" y="812880"/>
+            <a:ext cx="0" cy="0"/>
+          </a:xfrm>
+          <a:prstGeom prst="rect">
+            <a:avLst/>
+          </a:prstGeom>
+          <a:ln w="0">
+            <a:noFill/>
+          </a:ln>
+        </p:spPr>
+      </p:sp>
+      <p:sp>
+        <p:nvSpPr>
+          <p:cNvPr id="85" name="PlaceHolder 2"/>
+          <p:cNvSpPr>
+            <a:spLocks noGrp="1"/>
+          </p:cNvSpPr>
+          <p:nvPr>
+            <p:ph type="body"/>
+          </p:nvPr>
+        </p:nvSpPr>
+        <p:spPr>
+          <a:xfrm>
+            <a:off x="756000" y="5078520"/>
+            <a:ext cx="6046200" cy="4809600"/>
+          </a:xfrm>
+          <a:prstGeom prst="rect">
+            <a:avLst/>
+          </a:prstGeom>
+          <a:noFill/>
+          <a:ln w="0">
+            <a:noFill/>
+          </a:ln>
+        </p:spPr>
+        <p:txBody>
+          <a:bodyPr lIns="0" rIns="0" tIns="0" bIns="0" anchor="t">
+            <a:noAutofit/>
+          </a:bodyPr>
+          <a:p>
+            <a:pPr marL="171360" indent="-171360">
+              <a:lnSpc>
+                <a:spcPct val="100000"/>
+              </a:lnSpc>
+              <a:buClr>
+                <a:srgbClr val="000000"/>
+              </a:buClr>
+              <a:buFont typeface="Calibri"/>
+              <a:buChar char="-"/>
+            </a:pPr>
+            <a:r>
+              <a:rPr b="0" lang="en-US" sz="2000" spc="-1" strike="noStrike">
+                <a:solidFill>
+                  <a:srgbClr val="000000"/>
+                </a:solidFill>
+                <a:latin typeface="Arial"/>
+              </a:rPr>
+              <a:t>Release markers to show when a release effects performance</a:t>
+            </a:r>
+            <a:endParaRPr b="0" lang="en-US" sz="2000" spc="-1" strike="noStrike">
+              <a:solidFill>
+                <a:srgbClr val="000000"/>
+              </a:solidFill>
+              <a:latin typeface="Arial"/>
+            </a:endParaRPr>
+          </a:p>
+        </p:txBody>
+      </p:sp>
+      <p:sp>
+        <p:nvSpPr>
+          <p:cNvPr id="86" name="PlaceHolder 3"/>
+          <p:cNvSpPr>
+            <a:spLocks noGrp="1"/>
+          </p:cNvSpPr>
+          <p:nvPr>
+            <p:ph type="sldNum" idx="7"/>
+          </p:nvPr>
+        </p:nvSpPr>
+        <p:spPr>
+          <a:xfrm>
+            <a:off x="4278960" y="10157400"/>
+            <a:ext cx="3279240" cy="532800"/>
+          </a:xfrm>
+          <a:prstGeom prst="rect">
+            <a:avLst/>
+          </a:prstGeom>
+          <a:noFill/>
+          <a:ln w="0">
+            <a:noFill/>
+          </a:ln>
+        </p:spPr>
+        <p:txBody>
+          <a:bodyPr lIns="0" rIns="0" tIns="0" bIns="0" anchor="b">
+            <a:noAutofit/>
+          </a:bodyPr>
+          <a:lstStyle>
+            <a:lvl1pPr indent="0" algn="r">
+              <a:lnSpc>
+                <a:spcPct val="100000"/>
+              </a:lnSpc>
+              <a:buNone/>
+              <a:tabLst>
+                <a:tab algn="l" pos="0"/>
+              </a:tabLst>
+              <a:defRPr b="0" lang="en-US" sz="1400" spc="-1" strike="noStrike">
+                <a:solidFill>
+                  <a:srgbClr val="000000"/>
+                </a:solidFill>
+                <a:latin typeface="Times New Roman"/>
+              </a:defRPr>
+            </a:lvl1pPr>
+          </a:lstStyle>
+          <a:p>
+            <a:pPr indent="0" algn="r">
+              <a:lnSpc>
+                <a:spcPct val="100000"/>
+              </a:lnSpc>
+              <a:buNone/>
+              <a:tabLst>
+                <a:tab algn="l" pos="0"/>
+              </a:tabLst>
+            </a:pPr>
+            <a:fld id="{22B0E6C3-44F0-42DD-90CD-6AD4608DEB4C}" type="slidenum">
               <a:rPr b="0" lang="en-US" sz="1400" spc="-1" strike="noStrike">
                 <a:solidFill>
                   <a:srgbClr val="000000"/>
@@ -725,7 +897,7 @@
       </p:grpSpPr>
       <p:sp>
         <p:nvSpPr>
-          <p:cNvPr id="86" name="PlaceHolder 1"/>
+          <p:cNvPr id="87" name="PlaceHolder 1"/>
           <p:cNvSpPr>
             <a:spLocks noGrp="1"/>
           </p:cNvSpPr>
@@ -748,7 +920,7 @@
       </p:sp>
       <p:sp>
         <p:nvSpPr>
-          <p:cNvPr id="87" name="PlaceHolder 2"/>
+          <p:cNvPr id="88" name="PlaceHolder 2"/>
           <p:cNvSpPr>
             <a:spLocks noGrp="1"/>
           </p:cNvSpPr>
@@ -759,7 +931,7 @@
         <p:spPr>
           <a:xfrm>
             <a:off x="756000" y="5078520"/>
-            <a:ext cx="6046920" cy="4810320"/>
+            <a:ext cx="6046200" cy="4809600"/>
           </a:xfrm>
           <a:prstGeom prst="rect">
             <a:avLst/>
@@ -774,26 +946,10 @@
             <a:noAutofit/>
           </a:bodyPr>
           <a:p>
-            <a:pPr marL="171360" indent="-171360">
-              <a:lnSpc>
-                <a:spcPct val="100000"/>
-              </a:lnSpc>
-              <a:buClr>
-                <a:srgbClr val="000000"/>
-              </a:buClr>
-              <a:buFont typeface="Calibri"/>
-              <a:buChar char="-"/>
+            <a:pPr marL="216000" indent="-216000">
+              <a:buNone/>
             </a:pPr>
-            <a:r>
-              <a:rPr b="0" lang="en-US" sz="2000" spc="-1" strike="noStrike">
-                <a:solidFill>
-                  <a:srgbClr val="000000"/>
-                </a:solidFill>
-                <a:latin typeface="Arial"/>
-              </a:rPr>
-              <a:t>Release markers to show when a release effects performance</a:t>
-            </a:r>
-            <a:endParaRPr b="0" lang="en-US" sz="2000" spc="-1" strike="noStrike">
+            <a:endParaRPr b="0" lang="en-US" sz="1800" spc="-1" strike="noStrike">
               <a:solidFill>
                 <a:srgbClr val="000000"/>
               </a:solidFill>
@@ -804,18 +960,18 @@
       </p:sp>
       <p:sp>
         <p:nvSpPr>
-          <p:cNvPr id="88" name="PlaceHolder 3"/>
+          <p:cNvPr id="89" name="PlaceHolder 3"/>
           <p:cNvSpPr>
             <a:spLocks noGrp="1"/>
           </p:cNvSpPr>
           <p:nvPr>
-            <p:ph type="sldNum" idx="7"/>
+            <p:ph type="sldNum" idx="8"/>
           </p:nvPr>
         </p:nvSpPr>
         <p:spPr>
           <a:xfrm>
             <a:off x="4278960" y="10157400"/>
-            <a:ext cx="3279960" cy="533520"/>
+            <a:ext cx="3279240" cy="532800"/>
           </a:xfrm>
           <a:prstGeom prst="rect">
             <a:avLst/>
@@ -856,164 +1012,7 @@
                 <a:tab algn="l" pos="0"/>
               </a:tabLst>
             </a:pPr>
-            <a:fld id="{4C1F7CE5-E88B-4D25-BF31-7FBBDED62381}" type="slidenum">
-              <a:rPr b="0" lang="en-US" sz="1400" spc="-1" strike="noStrike">
-                <a:solidFill>
-                  <a:srgbClr val="000000"/>
-                </a:solidFill>
-                <a:latin typeface="Times New Roman"/>
-              </a:rPr>
-              <a:t>&lt;number&gt;</a:t>
-            </a:fld>
-            <a:endParaRPr b="0" lang="en-US" sz="1400" spc="-1" strike="noStrike">
-              <a:solidFill>
-                <a:srgbClr val="000000"/>
-              </a:solidFill>
-              <a:latin typeface="Times New Roman"/>
-            </a:endParaRPr>
-          </a:p>
-        </p:txBody>
-      </p:sp>
-    </p:spTree>
-  </p:cSld>
-</p:notes>
-</file>
-
-<file path=ppt/notesSlides/notesSlide13.xml><?xml version="1.0" encoding="utf-8"?>
-<p:notes xmlns:a="http://schemas.openxmlformats.org/drawingml/2006/main" xmlns:p="http://schemas.openxmlformats.org/presentationml/2006/main" xmlns:r="http://schemas.openxmlformats.org/officeDocument/2006/relationships" xmlns:p14="http://schemas.microsoft.com/office/powerpoint/2010/main" xmlns:p15="http://schemas.microsoft.com/office/powerpoint/2012/main" xmlns:mc="http://schemas.openxmlformats.org/markup-compatibility/2006">
-  <p:cSld>
-    <p:spTree>
-      <p:nvGrpSpPr>
-        <p:cNvPr id="1" name=""/>
-        <p:cNvGrpSpPr/>
-        <p:nvPr/>
-      </p:nvGrpSpPr>
-      <p:grpSpPr>
-        <a:xfrm>
-          <a:off x="0" y="0"/>
-          <a:ext cx="0" cy="0"/>
-          <a:chOff x="0" y="0"/>
-          <a:chExt cx="0" cy="0"/>
-        </a:xfrm>
-      </p:grpSpPr>
-      <p:sp>
-        <p:nvSpPr>
-          <p:cNvPr id="89" name="PlaceHolder 1"/>
-          <p:cNvSpPr>
-            <a:spLocks noGrp="1"/>
-          </p:cNvSpPr>
-          <p:nvPr>
-            <p:ph type="sldImg"/>
-          </p:nvPr>
-        </p:nvSpPr>
-        <p:spPr>
-          <a:xfrm>
-            <a:off x="0" y="812880"/>
-            <a:ext cx="0" cy="0"/>
-          </a:xfrm>
-          <a:prstGeom prst="rect">
-            <a:avLst/>
-          </a:prstGeom>
-          <a:ln w="0">
-            <a:noFill/>
-          </a:ln>
-        </p:spPr>
-      </p:sp>
-      <p:sp>
-        <p:nvSpPr>
-          <p:cNvPr id="90" name="PlaceHolder 2"/>
-          <p:cNvSpPr>
-            <a:spLocks noGrp="1"/>
-          </p:cNvSpPr>
-          <p:nvPr>
-            <p:ph type="body"/>
-          </p:nvPr>
-        </p:nvSpPr>
-        <p:spPr>
-          <a:xfrm>
-            <a:off x="756000" y="5078520"/>
-            <a:ext cx="6046920" cy="4810320"/>
-          </a:xfrm>
-          <a:prstGeom prst="rect">
-            <a:avLst/>
-          </a:prstGeom>
-          <a:noFill/>
-          <a:ln w="0">
-            <a:noFill/>
-          </a:ln>
-        </p:spPr>
-        <p:txBody>
-          <a:bodyPr lIns="0" rIns="0" tIns="0" bIns="0" anchor="t">
-            <a:noAutofit/>
-          </a:bodyPr>
-          <a:p>
-            <a:pPr marL="216000" indent="-216000">
-              <a:buNone/>
-            </a:pPr>
-            <a:endParaRPr b="0" lang="en-US" sz="1800" spc="-1" strike="noStrike">
-              <a:solidFill>
-                <a:srgbClr val="000000"/>
-              </a:solidFill>
-              <a:latin typeface="Arial"/>
-            </a:endParaRPr>
-          </a:p>
-        </p:txBody>
-      </p:sp>
-      <p:sp>
-        <p:nvSpPr>
-          <p:cNvPr id="91" name="PlaceHolder 3"/>
-          <p:cNvSpPr>
-            <a:spLocks noGrp="1"/>
-          </p:cNvSpPr>
-          <p:nvPr>
-            <p:ph type="sldNum" idx="8"/>
-          </p:nvPr>
-        </p:nvSpPr>
-        <p:spPr>
-          <a:xfrm>
-            <a:off x="4278960" y="10157400"/>
-            <a:ext cx="3279960" cy="533520"/>
-          </a:xfrm>
-          <a:prstGeom prst="rect">
-            <a:avLst/>
-          </a:prstGeom>
-          <a:noFill/>
-          <a:ln w="0">
-            <a:noFill/>
-          </a:ln>
-        </p:spPr>
-        <p:txBody>
-          <a:bodyPr lIns="0" rIns="0" tIns="0" bIns="0" anchor="b">
-            <a:noAutofit/>
-          </a:bodyPr>
-          <a:lstStyle>
-            <a:lvl1pPr indent="0" algn="r">
-              <a:lnSpc>
-                <a:spcPct val="100000"/>
-              </a:lnSpc>
-              <a:buNone/>
-              <a:tabLst>
-                <a:tab algn="l" pos="0"/>
-              </a:tabLst>
-              <a:defRPr b="0" lang="en-US" sz="1400" spc="-1" strike="noStrike">
-                <a:solidFill>
-                  <a:srgbClr val="000000"/>
-                </a:solidFill>
-                <a:latin typeface="Times New Roman"/>
-              </a:defRPr>
-            </a:lvl1pPr>
-          </a:lstStyle>
-          <a:p>
-            <a:pPr indent="0" algn="r">
-              <a:lnSpc>
-                <a:spcPct val="100000"/>
-              </a:lnSpc>
-              <a:buNone/>
-              <a:tabLst>
-                <a:tab algn="l" pos="0"/>
-              </a:tabLst>
-            </a:pPr>
-            <a:fld id="{04CF328D-AC8A-4556-B2CA-4E0FAE40F7FA}" type="slidenum">
+            <a:fld id="{C5198E37-F783-46EF-85E4-6E5F6587131F}" type="slidenum">
               <a:rPr b="0" lang="en-US" sz="1400" spc="-1" strike="noStrike">
                 <a:solidFill>
                   <a:srgbClr val="000000"/>
@@ -1055,7 +1054,7 @@
       </p:grpSpPr>
       <p:sp>
         <p:nvSpPr>
-          <p:cNvPr id="77" name="PlaceHolder 1"/>
+          <p:cNvPr id="75" name="PlaceHolder 1"/>
           <p:cNvSpPr>
             <a:spLocks noGrp="1"/>
           </p:cNvSpPr>
@@ -1078,7 +1077,7 @@
       </p:sp>
       <p:sp>
         <p:nvSpPr>
-          <p:cNvPr id="78" name="PlaceHolder 2"/>
+          <p:cNvPr id="76" name="PlaceHolder 2"/>
           <p:cNvSpPr>
             <a:spLocks noGrp="1"/>
           </p:cNvSpPr>
@@ -1089,7 +1088,7 @@
         <p:spPr>
           <a:xfrm>
             <a:off x="756000" y="5078520"/>
-            <a:ext cx="6046920" cy="4810320"/>
+            <a:ext cx="6046200" cy="4809600"/>
           </a:xfrm>
           <a:prstGeom prst="rect">
             <a:avLst/>
@@ -1118,7 +1117,7 @@
       </p:sp>
       <p:sp>
         <p:nvSpPr>
-          <p:cNvPr id="79" name="PlaceHolder 3"/>
+          <p:cNvPr id="77" name="PlaceHolder 3"/>
           <p:cNvSpPr>
             <a:spLocks noGrp="1"/>
           </p:cNvSpPr>
@@ -1129,7 +1128,7 @@
         <p:spPr>
           <a:xfrm>
             <a:off x="4278960" y="10157400"/>
-            <a:ext cx="3279960" cy="533520"/>
+            <a:ext cx="3279240" cy="532800"/>
           </a:xfrm>
           <a:prstGeom prst="rect">
             <a:avLst/>
@@ -1170,7 +1169,7 @@
                 <a:tab algn="l" pos="0"/>
               </a:tabLst>
             </a:pPr>
-            <a:fld id="{F7C68BB7-8937-4914-9C35-550B541EC6E4}" type="slidenum">
+            <a:fld id="{7890536E-0ECA-4978-B8FC-3BE8FE4A54C8}" type="slidenum">
               <a:rPr b="0" lang="en-US" sz="1400" spc="-1" strike="noStrike">
                 <a:solidFill>
                   <a:srgbClr val="000000"/>
@@ -1212,7 +1211,7 @@
       </p:grpSpPr>
       <p:sp>
         <p:nvSpPr>
-          <p:cNvPr id="80" name="PlaceHolder 1"/>
+          <p:cNvPr id="78" name="PlaceHolder 1"/>
           <p:cNvSpPr>
             <a:spLocks noGrp="1"/>
           </p:cNvSpPr>
@@ -1235,7 +1234,7 @@
       </p:sp>
       <p:sp>
         <p:nvSpPr>
-          <p:cNvPr id="81" name="PlaceHolder 2"/>
+          <p:cNvPr id="79" name="PlaceHolder 2"/>
           <p:cNvSpPr>
             <a:spLocks noGrp="1"/>
           </p:cNvSpPr>
@@ -1246,7 +1245,7 @@
         <p:spPr>
           <a:xfrm>
             <a:off x="756000" y="5078520"/>
-            <a:ext cx="6046920" cy="4810320"/>
+            <a:ext cx="6046200" cy="4809600"/>
           </a:xfrm>
           <a:prstGeom prst="rect">
             <a:avLst/>
@@ -1389,7 +1388,7 @@
       </p:sp>
       <p:sp>
         <p:nvSpPr>
-          <p:cNvPr id="82" name="PlaceHolder 3"/>
+          <p:cNvPr id="80" name="PlaceHolder 3"/>
           <p:cNvSpPr>
             <a:spLocks noGrp="1"/>
           </p:cNvSpPr>
@@ -1400,7 +1399,7 @@
         <p:spPr>
           <a:xfrm>
             <a:off x="4278960" y="10157400"/>
-            <a:ext cx="3279960" cy="533520"/>
+            <a:ext cx="3279240" cy="532800"/>
           </a:xfrm>
           <a:prstGeom prst="rect">
             <a:avLst/>
@@ -1441,7 +1440,7 @@
                 <a:tab algn="l" pos="0"/>
               </a:tabLst>
             </a:pPr>
-            <a:fld id="{08F98B67-7E8D-41A9-8E0E-540A9A3BF38F}" type="slidenum">
+            <a:fld id="{8CC02B89-48F7-4147-8EBF-9BFEB26115EE}" type="slidenum">
               <a:rPr b="0" lang="en-US" sz="1400" spc="-1" strike="noStrike">
                 <a:solidFill>
                   <a:srgbClr val="000000"/>
@@ -1494,7 +1493,7 @@
         <p:spPr>
           <a:xfrm>
             <a:off x="457200" y="205920"/>
-            <a:ext cx="8227800" cy="855360"/>
+            <a:ext cx="8227080" cy="854640"/>
           </a:xfrm>
           <a:prstGeom prst="rect">
             <a:avLst/>
@@ -1534,7 +1533,7 @@
         <p:spPr>
           <a:xfrm>
             <a:off x="457200" y="1200240"/>
-            <a:ext cx="8227800" cy="3392640"/>
+            <a:ext cx="8227080" cy="3391920"/>
           </a:xfrm>
           <a:prstGeom prst="rect">
             <a:avLst/>
@@ -1607,7 +1606,7 @@
         <p:spPr>
           <a:xfrm>
             <a:off x="457200" y="205920"/>
-            <a:ext cx="8227800" cy="855360"/>
+            <a:ext cx="8227080" cy="854640"/>
           </a:xfrm>
           <a:prstGeom prst="rect">
             <a:avLst/>
@@ -1656,7 +1655,7 @@
         <p:spPr>
           <a:xfrm>
             <a:off x="457200" y="1200240"/>
-            <a:ext cx="8227800" cy="3392640"/>
+            <a:ext cx="8227080" cy="3391920"/>
           </a:xfrm>
           <a:prstGeom prst="rect">
             <a:avLst/>
@@ -1907,7 +1906,7 @@
         <p:spPr>
           <a:xfrm>
             <a:off x="475200" y="416160"/>
-            <a:ext cx="8310600" cy="5158800"/>
+            <a:ext cx="8309880" cy="5158080"/>
           </a:xfrm>
           <a:prstGeom prst="rect">
             <a:avLst/>
@@ -1930,7 +1929,7 @@
         <p:spPr>
           <a:xfrm>
             <a:off x="6418080" y="1583640"/>
-            <a:ext cx="2147760" cy="2823840"/>
+            <a:ext cx="2147040" cy="2823120"/>
           </a:xfrm>
           <a:prstGeom prst="rect">
             <a:avLst/>
@@ -2159,538 +2158,44 @@
           <a:chExt cx="0" cy="0"/>
         </a:xfrm>
       </p:grpSpPr>
-      <p:cxnSp>
-        <p:nvCxnSpPr>
-          <p:cNvPr id="45" name="Straight Connector 27"/>
-          <p:cNvCxnSpPr/>
-          <p:nvPr/>
-        </p:nvCxnSpPr>
-        <p:spPr>
-          <a:xfrm>
-            <a:off x="3054960" y="443880"/>
-            <a:ext cx="720" cy="4291200"/>
-          </a:xfrm>
-          <a:prstGeom prst="straightConnector1">
-            <a:avLst/>
-          </a:prstGeom>
-          <a:ln w="19050">
-            <a:solidFill>
-              <a:srgbClr val="0c7438"/>
-            </a:solidFill>
-            <a:prstDash val="sysDash"/>
-            <a:round/>
-          </a:ln>
-        </p:spPr>
-      </p:cxnSp>
-      <p:cxnSp>
-        <p:nvCxnSpPr>
-          <p:cNvPr id="46" name="Straight Connector 30"/>
-          <p:cNvCxnSpPr/>
-          <p:nvPr/>
-        </p:nvCxnSpPr>
-        <p:spPr>
-          <a:xfrm>
-            <a:off x="5330520" y="443880"/>
-            <a:ext cx="720" cy="4199760"/>
-          </a:xfrm>
-          <a:prstGeom prst="straightConnector1">
-            <a:avLst/>
-          </a:prstGeom>
-          <a:ln w="19050">
-            <a:solidFill>
-              <a:srgbClr val="0c7438"/>
-            </a:solidFill>
-            <a:prstDash val="sysDash"/>
-            <a:round/>
-          </a:ln>
-        </p:spPr>
-      </p:cxnSp>
-      <p:pic>
-        <p:nvPicPr>
-          <p:cNvPr id="47" name="Picture 31" descr=""/>
-          <p:cNvPicPr/>
-          <p:nvPr/>
-        </p:nvPicPr>
-        <p:blipFill>
-          <a:blip r:embed="rId1"/>
-          <a:stretch/>
-        </p:blipFill>
-        <p:spPr>
-          <a:xfrm rot="20760000">
-            <a:off x="2518560" y="3313080"/>
-            <a:ext cx="3295440" cy="479520"/>
-          </a:xfrm>
-          <a:prstGeom prst="rect">
-            <a:avLst/>
-          </a:prstGeom>
-          <a:ln w="0">
-            <a:noFill/>
-          </a:ln>
-        </p:spPr>
-      </p:pic>
-      <p:pic>
-        <p:nvPicPr>
-          <p:cNvPr id="48" name="Picture 2" descr="A black background with a black square&#10;&#10;Description automatically generated with medium confidence"/>
-          <p:cNvPicPr/>
-          <p:nvPr/>
-        </p:nvPicPr>
-        <p:blipFill>
-          <a:blip r:embed="rId2"/>
-          <a:stretch/>
-        </p:blipFill>
-        <p:spPr>
-          <a:xfrm>
-            <a:off x="1302120" y="369720"/>
-            <a:ext cx="1467360" cy="517680"/>
-          </a:xfrm>
-          <a:prstGeom prst="rect">
-            <a:avLst/>
-          </a:prstGeom>
-          <a:ln w="0">
-            <a:noFill/>
-          </a:ln>
-        </p:spPr>
-      </p:pic>
-      <p:pic>
-        <p:nvPicPr>
-          <p:cNvPr id="49" name="Picture 6" descr="A black background with a black square&#10;&#10;Description automatically generated with medium confidence"/>
-          <p:cNvPicPr/>
-          <p:nvPr/>
-        </p:nvPicPr>
-        <p:blipFill>
-          <a:blip r:embed="rId3"/>
-          <a:stretch/>
-        </p:blipFill>
-        <p:spPr>
-          <a:xfrm>
-            <a:off x="3342240" y="369720"/>
-            <a:ext cx="1721520" cy="517680"/>
-          </a:xfrm>
-          <a:prstGeom prst="rect">
-            <a:avLst/>
-          </a:prstGeom>
-          <a:ln w="0">
-            <a:noFill/>
-          </a:ln>
-        </p:spPr>
-      </p:pic>
-      <p:pic>
-        <p:nvPicPr>
-          <p:cNvPr id="50" name="Picture 12" descr="A black background with a black square&#10;&#10;Description automatically generated with medium confidence"/>
-          <p:cNvPicPr/>
-          <p:nvPr/>
-        </p:nvPicPr>
-        <p:blipFill>
-          <a:blip r:embed="rId4"/>
-          <a:stretch/>
-        </p:blipFill>
-        <p:spPr>
-          <a:xfrm>
-            <a:off x="5600520" y="369720"/>
-            <a:ext cx="1497600" cy="517680"/>
-          </a:xfrm>
-          <a:prstGeom prst="rect">
-            <a:avLst/>
-          </a:prstGeom>
-          <a:ln w="0">
-            <a:noFill/>
-          </a:ln>
-        </p:spPr>
-      </p:pic>
-      <p:pic>
-        <p:nvPicPr>
-          <p:cNvPr id="51" name="Picture 23" descr="A blue hexagon with black text&#10;&#10;Description automatically generated"/>
-          <p:cNvPicPr/>
-          <p:nvPr/>
-        </p:nvPicPr>
-        <p:blipFill>
-          <a:blip r:embed="rId5"/>
-          <a:stretch/>
-        </p:blipFill>
-        <p:spPr>
-          <a:xfrm>
-            <a:off x="5546160" y="2075760"/>
-            <a:ext cx="1606320" cy="1392480"/>
-          </a:xfrm>
-          <a:prstGeom prst="rect">
-            <a:avLst/>
-          </a:prstGeom>
-          <a:ln w="0">
-            <a:noFill/>
-          </a:ln>
-        </p:spPr>
-      </p:pic>
-      <p:pic>
-        <p:nvPicPr>
-          <p:cNvPr id="52" name="Picture 25" descr=""/>
-          <p:cNvPicPr/>
-          <p:nvPr/>
-        </p:nvPicPr>
-        <p:blipFill>
-          <a:blip r:embed="rId6"/>
-          <a:stretch/>
-        </p:blipFill>
-        <p:spPr>
-          <a:xfrm rot="823200">
-            <a:off x="2508480" y="1796760"/>
-            <a:ext cx="3295440" cy="479520"/>
-          </a:xfrm>
-          <a:prstGeom prst="rect">
-            <a:avLst/>
-          </a:prstGeom>
-          <a:ln w="0">
-            <a:noFill/>
-          </a:ln>
-        </p:spPr>
-      </p:pic>
-      <p:pic>
-        <p:nvPicPr>
-          <p:cNvPr id="53" name="Picture 14" descr="A black screen with white text&#10;&#10;Description automatically generated"/>
-          <p:cNvPicPr/>
-          <p:nvPr/>
-        </p:nvPicPr>
-        <p:blipFill>
-          <a:blip r:embed="rId7"/>
-          <a:stretch/>
-        </p:blipFill>
-        <p:spPr>
-          <a:xfrm>
-            <a:off x="1202760" y="866160"/>
-            <a:ext cx="1665720" cy="1665720"/>
-          </a:xfrm>
-          <a:prstGeom prst="rect">
-            <a:avLst/>
-          </a:prstGeom>
-          <a:ln w="0">
-            <a:noFill/>
-          </a:ln>
-        </p:spPr>
-      </p:pic>
-      <p:pic>
-        <p:nvPicPr>
-          <p:cNvPr id="54" name="Picture 17" descr="A black background with white text&#10;&#10;Description automatically generated"/>
-          <p:cNvPicPr/>
-          <p:nvPr/>
-        </p:nvPicPr>
-        <p:blipFill>
-          <a:blip r:embed="rId8"/>
-          <a:stretch/>
-        </p:blipFill>
-        <p:spPr>
-          <a:xfrm>
-            <a:off x="1202760" y="3006360"/>
-            <a:ext cx="1665720" cy="1657440"/>
-          </a:xfrm>
-          <a:prstGeom prst="rect">
-            <a:avLst/>
-          </a:prstGeom>
-          <a:ln w="0">
-            <a:noFill/>
-          </a:ln>
-        </p:spPr>
-      </p:pic>
-      <p:pic>
-        <p:nvPicPr>
-          <p:cNvPr id="55" name="Picture 19" descr="A yellow arrow with black text&#10;&#10;Description automatically generated"/>
-          <p:cNvPicPr/>
-          <p:nvPr/>
-        </p:nvPicPr>
-        <p:blipFill>
-          <a:blip r:embed="rId9"/>
-          <a:stretch/>
-        </p:blipFill>
-        <p:spPr>
-          <a:xfrm>
-            <a:off x="1809360" y="2385000"/>
-            <a:ext cx="452520" cy="774000"/>
-          </a:xfrm>
-          <a:prstGeom prst="rect">
-            <a:avLst/>
-          </a:prstGeom>
-          <a:ln w="0">
-            <a:noFill/>
-          </a:ln>
-        </p:spPr>
-      </p:pic>
-      <p:pic>
-        <p:nvPicPr>
-          <p:cNvPr id="56" name="Picture 21" descr="A pink sign with black text&#10;&#10;Description automatically generated"/>
-          <p:cNvPicPr/>
-          <p:nvPr/>
-        </p:nvPicPr>
-        <p:blipFill>
-          <a:blip r:embed="rId10"/>
-          <a:stretch/>
-        </p:blipFill>
-        <p:spPr>
-          <a:xfrm>
-            <a:off x="2347560" y="2185560"/>
-            <a:ext cx="559440" cy="346680"/>
-          </a:xfrm>
-          <a:prstGeom prst="rect">
-            <a:avLst/>
-          </a:prstGeom>
-          <a:ln w="0">
-            <a:noFill/>
-          </a:ln>
-        </p:spPr>
-      </p:pic>
-      <p:pic>
-        <p:nvPicPr>
-          <p:cNvPr id="57" name="Picture 28" descr="A pink sign with black text&#10;&#10;Description automatically generated"/>
-          <p:cNvPicPr/>
-          <p:nvPr/>
-        </p:nvPicPr>
-        <p:blipFill>
-          <a:blip r:embed="rId11"/>
-          <a:stretch/>
-        </p:blipFill>
-        <p:spPr>
-          <a:xfrm>
-            <a:off x="2347560" y="4323960"/>
-            <a:ext cx="559440" cy="346680"/>
-          </a:xfrm>
-          <a:prstGeom prst="rect">
-            <a:avLst/>
-          </a:prstGeom>
-          <a:ln w="0">
-            <a:noFill/>
-          </a:ln>
-        </p:spPr>
-      </p:pic>
-    </p:spTree>
-  </p:cSld>
-  <mc:AlternateContent>
-    <mc:Choice Requires="p14">
-      <p:transition spd="slow" p14:dur="2000"/>
-    </mc:Choice>
-    <mc:Fallback>
-      <p:transition spd="slow"/>
-    </mc:Fallback>
-  </mc:AlternateContent>
-  <p:timing>
-    <p:tnLst>
-      <p:par>
-        <p:cTn id="144" dur="indefinite" restart="never" nodeType="tmRoot">
-          <p:childTnLst>
-            <p:seq>
-              <p:cTn id="145" dur="indefinite" nodeType="mainSeq">
-                <p:childTnLst>
-                  <p:par>
-                    <p:cTn id="146" fill="hold">
-                      <p:stCondLst>
-                        <p:cond delay="0"/>
-                      </p:stCondLst>
-                      <p:childTnLst>
-                        <p:par>
-                          <p:cTn id="147" fill="hold">
-                            <p:stCondLst>
-                              <p:cond delay="0"/>
-                            </p:stCondLst>
-                            <p:childTnLst>
-                              <p:par>
-                                <p:cTn id="148" nodeType="afterEffect" fill="hold" presetClass="entr" presetID="2" presetSubtype="4">
-                                  <p:stCondLst>
-                                    <p:cond delay="0"/>
-                                  </p:stCondLst>
-                                  <p:childTnLst>
-                                    <p:set>
-                                      <p:cBhvr>
-                                        <p:cTn id="149" dur="1" fill="hold">
-                                          <p:stCondLst>
-                                            <p:cond delay="0"/>
-                                          </p:stCondLst>
-                                        </p:cTn>
-                                        <p:tgtEl>
-                                          <p:spTgt spid="57"/>
-                                        </p:tgtEl>
-                                        <p:attrNameLst>
-                                          <p:attrName>style.visibility</p:attrName>
-                                        </p:attrNameLst>
-                                      </p:cBhvr>
-                                      <p:to>
-                                        <p:strVal val="visible"/>
-                                      </p:to>
-                                    </p:set>
-                                    <p:anim calcmode="lin" valueType="num">
-                                      <p:cBhvr additive="repl">
-                                        <p:cTn id="150" dur="500" fill="hold"/>
-                                        <p:tgtEl>
-                                          <p:spTgt spid="57"/>
-                                        </p:tgtEl>
-                                        <p:attrNameLst>
-                                          <p:attrName>ppt_x</p:attrName>
-                                        </p:attrNameLst>
-                                      </p:cBhvr>
-                                      <p:tavLst>
-                                        <p:tav tm="0">
-                                          <p:val>
-                                            <p:strVal val="#ppt_x"/>
-                                          </p:val>
-                                        </p:tav>
-                                        <p:tav tm="100000">
-                                          <p:val>
-                                            <p:strVal val="#ppt_x"/>
-                                          </p:val>
-                                        </p:tav>
-                                      </p:tavLst>
-                                    </p:anim>
-                                    <p:anim calcmode="lin" valueType="num">
-                                      <p:cBhvr additive="repl">
-                                        <p:cTn id="151" dur="500" fill="hold"/>
-                                        <p:tgtEl>
-                                          <p:spTgt spid="57"/>
-                                        </p:tgtEl>
-                                        <p:attrNameLst>
-                                          <p:attrName>ppt_y</p:attrName>
-                                        </p:attrNameLst>
-                                      </p:cBhvr>
-                                      <p:tavLst>
-                                        <p:tav tm="0">
-                                          <p:val>
-                                            <p:strVal val="1+#ppt_h/2"/>
-                                          </p:val>
-                                        </p:tav>
-                                        <p:tav tm="100000">
-                                          <p:val>
-                                            <p:strVal val="#ppt_y"/>
-                                          </p:val>
-                                        </p:tav>
-                                      </p:tavLst>
-                                    </p:anim>
-                                  </p:childTnLst>
-                                </p:cTn>
-                              </p:par>
-                            </p:childTnLst>
-                          </p:cTn>
-                        </p:par>
-                        <p:par>
-                          <p:cTn id="152" fill="hold">
-                            <p:stCondLst>
-                              <p:cond delay="500"/>
-                            </p:stCondLst>
-                            <p:childTnLst>
-                              <p:par>
-                                <p:cTn id="153" nodeType="afterEffect" fill="hold" presetClass="entr" presetID="10">
-                                  <p:stCondLst>
-                                    <p:cond delay="0"/>
-                                  </p:stCondLst>
-                                  <p:childTnLst>
-                                    <p:set>
-                                      <p:cBhvr>
-                                        <p:cTn id="154" dur="1" fill="hold">
-                                          <p:stCondLst>
-                                            <p:cond delay="0"/>
-                                          </p:stCondLst>
-                                        </p:cTn>
-                                        <p:tgtEl>
-                                          <p:spTgt spid="47"/>
-                                        </p:tgtEl>
-                                        <p:attrNameLst>
-                                          <p:attrName>style.visibility</p:attrName>
-                                        </p:attrNameLst>
-                                      </p:cBhvr>
-                                      <p:to>
-                                        <p:strVal val="visible"/>
-                                      </p:to>
-                                    </p:set>
-                                    <p:animEffect filter="fade" transition="in">
-                                      <p:cBhvr additive="repl">
-                                        <p:cTn id="155" dur="500"/>
-                                        <p:tgtEl>
-                                          <p:spTgt spid="47"/>
-                                        </p:tgtEl>
-                                      </p:cBhvr>
-                                    </p:animEffect>
-                                  </p:childTnLst>
-                                </p:cTn>
-                              </p:par>
-                            </p:childTnLst>
-                          </p:cTn>
-                        </p:par>
-                      </p:childTnLst>
-                    </p:cTn>
-                  </p:par>
-                </p:childTnLst>
-              </p:cTn>
-              <p:prevCondLst>
-                <p:cond evt="onPrev">
-                  <p:tgtEl>
-                    <p:sldTgt/>
-                  </p:tgtEl>
-                </p:cond>
-              </p:prevCondLst>
-              <p:nextCondLst>
-                <p:cond evt="onNext">
-                  <p:tgtEl>
-                    <p:sldTgt/>
-                  </p:tgtEl>
-                </p:cond>
-              </p:nextCondLst>
-            </p:seq>
-          </p:childTnLst>
-        </p:cTn>
-      </p:par>
-    </p:tnLst>
-  </p:timing>
-</p:sld>
-</file>
-
-<file path=ppt/slides/slide11.xml><?xml version="1.0" encoding="utf-8"?>
-<p:sld xmlns:a="http://schemas.openxmlformats.org/drawingml/2006/main" xmlns:p="http://schemas.openxmlformats.org/presentationml/2006/main" xmlns:r="http://schemas.openxmlformats.org/officeDocument/2006/relationships" xmlns:p14="http://schemas.microsoft.com/office/powerpoint/2010/main" xmlns:p15="http://schemas.microsoft.com/office/powerpoint/2012/main" xmlns:mc="http://schemas.openxmlformats.org/markup-compatibility/2006">
-  <p:cSld>
-    <p:spTree>
-      <p:nvGrpSpPr>
-        <p:cNvPr id="1" name=""/>
-        <p:cNvGrpSpPr/>
-        <p:nvPr/>
-      </p:nvGrpSpPr>
-      <p:grpSpPr>
-        <a:xfrm>
-          <a:off x="0" y="0"/>
-          <a:ext cx="0" cy="0"/>
-          <a:chOff x="0" y="0"/>
-          <a:chExt cx="0" cy="0"/>
-        </a:xfrm>
-      </p:grpSpPr>
       <p:grpSp>
         <p:nvGrpSpPr>
-          <p:cNvPr id="58" name="Group 3"/>
+          <p:cNvPr id="56" name="Group 3"/>
           <p:cNvGrpSpPr/>
           <p:nvPr/>
         </p:nvGrpSpPr>
         <p:grpSpPr>
           <a:xfrm>
             <a:off x="1457280" y="600840"/>
-            <a:ext cx="6228720" cy="3940920"/>
+            <a:ext cx="6228000" cy="3940200"/>
             <a:chOff x="1457280" y="600840"/>
-            <a:chExt cx="6228720" cy="3940920"/>
+            <a:chExt cx="6228000" cy="3940200"/>
           </a:xfrm>
         </p:grpSpPr>
         <p:grpSp>
           <p:nvGrpSpPr>
-            <p:cNvPr id="59" name="Group 5"/>
+            <p:cNvPr id="57" name="Group 5"/>
             <p:cNvGrpSpPr/>
             <p:nvPr/>
           </p:nvGrpSpPr>
           <p:grpSpPr>
             <a:xfrm>
               <a:off x="1457280" y="600840"/>
-              <a:ext cx="6228720" cy="505800"/>
+              <a:ext cx="6228000" cy="505080"/>
               <a:chOff x="1457280" y="600840"/>
-              <a:chExt cx="6228720" cy="505800"/>
+              <a:chExt cx="6228000" cy="505080"/>
             </a:xfrm>
           </p:grpSpPr>
           <p:sp>
             <p:nvSpPr>
-              <p:cNvPr id="60" name="Rectangle 4"/>
+              <p:cNvPr id="58" name="Rectangle 4"/>
               <p:cNvSpPr/>
               <p:nvPr/>
             </p:nvSpPr>
             <p:spPr>
               <a:xfrm>
                 <a:off x="1457280" y="717840"/>
-                <a:ext cx="6099120" cy="258120"/>
+                <a:ext cx="6098400" cy="257400"/>
               </a:xfrm>
               <a:prstGeom prst="rect">
                 <a:avLst/>
@@ -2740,7 +2245,7 @@
           </p:sp>
           <p:pic>
             <p:nvPicPr>
-              <p:cNvPr id="61" name="Picture 1" descr=""/>
+              <p:cNvPr id="59" name="Picture 1" descr=""/>
               <p:cNvPicPr/>
               <p:nvPr/>
             </p:nvPicPr>
@@ -2752,7 +2257,7 @@
             <p:spPr>
               <a:xfrm>
                 <a:off x="4668840" y="600840"/>
-                <a:ext cx="3017160" cy="505800"/>
+                <a:ext cx="3016440" cy="505080"/>
               </a:xfrm>
               <a:prstGeom prst="rect">
                 <a:avLst/>
@@ -2765,7 +2270,7 @@
         </p:grpSp>
         <p:pic>
           <p:nvPicPr>
-            <p:cNvPr id="62" name="Picture 2" descr="A screenshot of a computer&#10;&#10;Description automatically generated"/>
+            <p:cNvPr id="60" name="Picture 2" descr="A screenshot of a computer&#10;&#10;Description automatically generated"/>
             <p:cNvPicPr/>
             <p:nvPr/>
           </p:nvPicPr>
@@ -2776,7 +2281,7 @@
           <p:spPr>
             <a:xfrm>
               <a:off x="1457280" y="976680"/>
-              <a:ext cx="6099120" cy="3565080"/>
+              <a:ext cx="6098400" cy="3564360"/>
             </a:xfrm>
             <a:prstGeom prst="rect">
               <a:avLst/>
@@ -2803,7 +2308,7 @@
 </p:sld>
 </file>
 
-<file path=ppt/slides/slide12.xml><?xml version="1.0" encoding="utf-8"?>
+<file path=ppt/slides/slide11.xml><?xml version="1.0" encoding="utf-8"?>
 <p:sld xmlns:a="http://schemas.openxmlformats.org/drawingml/2006/main" xmlns:p="http://schemas.openxmlformats.org/presentationml/2006/main" xmlns:r="http://schemas.openxmlformats.org/officeDocument/2006/relationships" xmlns:p14="http://schemas.microsoft.com/office/powerpoint/2010/main" xmlns:p15="http://schemas.microsoft.com/office/powerpoint/2012/main" xmlns:mc="http://schemas.openxmlformats.org/markup-compatibility/2006">
   <p:cSld>
     <p:spTree>
@@ -2822,28 +2327,28 @@
       </p:grpSpPr>
       <p:grpSp>
         <p:nvGrpSpPr>
-          <p:cNvPr id="63" name="Group 4"/>
+          <p:cNvPr id="61" name="Group 4"/>
           <p:cNvGrpSpPr/>
           <p:nvPr/>
         </p:nvGrpSpPr>
         <p:grpSpPr>
           <a:xfrm>
             <a:off x="1715760" y="472320"/>
-            <a:ext cx="5522040" cy="4052160"/>
+            <a:ext cx="5521320" cy="4051440"/>
             <a:chOff x="1715760" y="472320"/>
-            <a:chExt cx="5522040" cy="4052160"/>
+            <a:chExt cx="5521320" cy="4051440"/>
           </a:xfrm>
         </p:grpSpPr>
         <p:sp>
           <p:nvSpPr>
-            <p:cNvPr id="64" name="Rectangle 5"/>
+            <p:cNvPr id="62" name="Rectangle 5"/>
             <p:cNvSpPr/>
             <p:nvPr/>
           </p:nvSpPr>
           <p:spPr>
             <a:xfrm>
               <a:off x="1715760" y="797400"/>
-              <a:ext cx="5411160" cy="3727080"/>
+              <a:ext cx="5410440" cy="3726360"/>
             </a:xfrm>
             <a:prstGeom prst="rect">
               <a:avLst/>
@@ -2893,7 +2398,7 @@
         </p:sp>
         <p:pic>
           <p:nvPicPr>
-            <p:cNvPr id="65" name="Picture 6" descr="A screenshot of a graph&#10;&#10;Description automatically generated"/>
+            <p:cNvPr id="63" name="Picture 6" descr="A screenshot of a graph&#10;&#10;Description automatically generated"/>
             <p:cNvPicPr/>
             <p:nvPr/>
           </p:nvPicPr>
@@ -2904,7 +2409,7 @@
           <p:spPr>
             <a:xfrm>
               <a:off x="1961640" y="1075680"/>
-              <a:ext cx="4919040" cy="3284640"/>
+              <a:ext cx="4918320" cy="3283920"/>
             </a:xfrm>
             <a:prstGeom prst="rect">
               <a:avLst/>
@@ -2916,14 +2421,14 @@
         </p:pic>
         <p:sp>
           <p:nvSpPr>
-            <p:cNvPr id="66" name="Rectangle 1"/>
+            <p:cNvPr id="64" name="Rectangle 1"/>
             <p:cNvSpPr/>
             <p:nvPr/>
           </p:nvSpPr>
           <p:spPr>
             <a:xfrm>
               <a:off x="1715760" y="577800"/>
-              <a:ext cx="5411160" cy="279000"/>
+              <a:ext cx="5410440" cy="278280"/>
             </a:xfrm>
             <a:prstGeom prst="rect">
               <a:avLst/>
@@ -2973,7 +2478,7 @@
         </p:sp>
         <p:pic>
           <p:nvPicPr>
-            <p:cNvPr id="67" name="Picture 3" descr=""/>
+            <p:cNvPr id="65" name="Picture 3" descr=""/>
             <p:cNvPicPr/>
             <p:nvPr/>
           </p:nvPicPr>
@@ -2985,7 +2490,7 @@
           <p:spPr>
             <a:xfrm>
               <a:off x="4209840" y="472320"/>
-              <a:ext cx="3027960" cy="507600"/>
+              <a:ext cx="3027240" cy="506880"/>
             </a:xfrm>
             <a:prstGeom prst="rect">
               <a:avLst/>
@@ -3009,38 +2514,38 @@
   <p:timing>
     <p:tnLst>
       <p:par>
-        <p:cTn id="156" dur="indefinite" restart="never" nodeType="tmRoot">
+        <p:cTn id="144" dur="indefinite" restart="never" nodeType="tmRoot">
           <p:childTnLst>
             <p:seq>
-              <p:cTn id="157" dur="indefinite" nodeType="mainSeq">
+              <p:cTn id="145" dur="indefinite" nodeType="mainSeq">
                 <p:childTnLst>
                   <p:par>
-                    <p:cTn id="158" fill="hold">
+                    <p:cTn id="146" fill="hold">
                       <p:stCondLst>
                         <p:cond delay="0"/>
                       </p:stCondLst>
                       <p:childTnLst>
                         <p:par>
-                          <p:cTn id="159" fill="hold">
+                          <p:cTn id="147" fill="hold">
                             <p:stCondLst>
                               <p:cond delay="0"/>
                             </p:stCondLst>
                             <p:childTnLst>
                               <p:par>
-                                <p:cTn id="160" nodeType="withEffect" fill="hold" presetClass="entr" presetID="2" presetSubtype="8">
+                                <p:cTn id="148" nodeType="withEffect" fill="hold" presetClass="entr" presetID="2" presetSubtype="8">
                                   <p:stCondLst>
                                     <p:cond delay="0"/>
                                   </p:stCondLst>
                                   <p:childTnLst>
                                     <p:set>
                                       <p:cBhvr>
-                                        <p:cTn id="161" dur="1" fill="hold">
+                                        <p:cTn id="149" dur="1" fill="hold">
                                           <p:stCondLst>
                                             <p:cond delay="0"/>
                                           </p:stCondLst>
                                         </p:cTn>
                                         <p:tgtEl>
-                                          <p:spTgt spid="63"/>
+                                          <p:spTgt spid="61"/>
                                         </p:tgtEl>
                                         <p:attrNameLst>
                                           <p:attrName>style.visibility</p:attrName>
@@ -3052,9 +2557,9 @@
                                     </p:set>
                                     <p:anim calcmode="lin" valueType="num">
                                       <p:cBhvr additive="repl">
-                                        <p:cTn id="162" dur="1000" fill="hold"/>
-                                        <p:tgtEl>
-                                          <p:spTgt spid="63"/>
+                                        <p:cTn id="150" dur="1000" fill="hold"/>
+                                        <p:tgtEl>
+                                          <p:spTgt spid="61"/>
                                         </p:tgtEl>
                                         <p:attrNameLst>
                                           <p:attrName>ppt_x</p:attrName>
@@ -3075,9 +2580,9 @@
                                     </p:anim>
                                     <p:anim calcmode="lin" valueType="num">
                                       <p:cBhvr additive="repl">
-                                        <p:cTn id="163" dur="1000" fill="hold"/>
-                                        <p:tgtEl>
-                                          <p:spTgt spid="63"/>
+                                        <p:cTn id="151" dur="1000" fill="hold"/>
+                                        <p:tgtEl>
+                                          <p:spTgt spid="61"/>
                                         </p:tgtEl>
                                         <p:attrNameLst>
                                           <p:attrName>ppt_y</p:attrName>
@@ -3087,6 +2592,505 @@
                                         <p:tav tm="0">
                                           <p:val>
                                             <p:strVal val="#ppt_y"/>
+                                          </p:val>
+                                        </p:tav>
+                                        <p:tav tm="100000">
+                                          <p:val>
+                                            <p:strVal val="#ppt_y"/>
+                                          </p:val>
+                                        </p:tav>
+                                      </p:tavLst>
+                                    </p:anim>
+                                  </p:childTnLst>
+                                </p:cTn>
+                              </p:par>
+                            </p:childTnLst>
+                          </p:cTn>
+                        </p:par>
+                      </p:childTnLst>
+                    </p:cTn>
+                  </p:par>
+                </p:childTnLst>
+              </p:cTn>
+              <p:prevCondLst>
+                <p:cond evt="onPrev">
+                  <p:tgtEl>
+                    <p:sldTgt/>
+                  </p:tgtEl>
+                </p:cond>
+              </p:prevCondLst>
+              <p:nextCondLst>
+                <p:cond evt="onNext">
+                  <p:tgtEl>
+                    <p:sldTgt/>
+                  </p:tgtEl>
+                </p:cond>
+              </p:nextCondLst>
+            </p:seq>
+          </p:childTnLst>
+        </p:cTn>
+      </p:par>
+    </p:tnLst>
+  </p:timing>
+</p:sld>
+</file>
+
+<file path=ppt/slides/slide12.xml><?xml version="1.0" encoding="utf-8"?>
+<p:sld xmlns:a="http://schemas.openxmlformats.org/drawingml/2006/main" xmlns:p="http://schemas.openxmlformats.org/presentationml/2006/main" xmlns:r="http://schemas.openxmlformats.org/officeDocument/2006/relationships" xmlns:p14="http://schemas.microsoft.com/office/powerpoint/2010/main" xmlns:p15="http://schemas.microsoft.com/office/powerpoint/2012/main" xmlns:mc="http://schemas.openxmlformats.org/markup-compatibility/2006">
+  <p:cSld>
+    <p:spTree>
+      <p:nvGrpSpPr>
+        <p:cNvPr id="1" name=""/>
+        <p:cNvGrpSpPr/>
+        <p:nvPr/>
+      </p:nvGrpSpPr>
+      <p:grpSpPr>
+        <a:xfrm>
+          <a:off x="0" y="0"/>
+          <a:ext cx="0" cy="0"/>
+          <a:chOff x="0" y="0"/>
+          <a:chExt cx="0" cy="0"/>
+        </a:xfrm>
+      </p:grpSpPr>
+      <p:pic>
+        <p:nvPicPr>
+          <p:cNvPr id="66" name="Picture 4" descr=""/>
+          <p:cNvPicPr/>
+          <p:nvPr/>
+        </p:nvPicPr>
+        <p:blipFill>
+          <a:blip r:embed="rId1"/>
+          <a:stretch/>
+        </p:blipFill>
+        <p:spPr>
+          <a:xfrm>
+            <a:off x="685800" y="1638000"/>
+            <a:ext cx="7770960" cy="1866240"/>
+          </a:xfrm>
+          <a:prstGeom prst="rect">
+            <a:avLst/>
+          </a:prstGeom>
+          <a:ln w="0">
+            <a:noFill/>
+          </a:ln>
+        </p:spPr>
+      </p:pic>
+      <p:pic>
+        <p:nvPicPr>
+          <p:cNvPr id="67" name="Picture 6" descr=""/>
+          <p:cNvPicPr/>
+          <p:nvPr/>
+        </p:nvPicPr>
+        <p:blipFill>
+          <a:blip r:embed="rId2"/>
+          <a:stretch/>
+        </p:blipFill>
+        <p:spPr>
+          <a:xfrm>
+            <a:off x="449280" y="592560"/>
+            <a:ext cx="2578320" cy="2582280"/>
+          </a:xfrm>
+          <a:prstGeom prst="rect">
+            <a:avLst/>
+          </a:prstGeom>
+          <a:ln w="0">
+            <a:noFill/>
+          </a:ln>
+          <a:effectLst>
+            <a:outerShdw algn="tl" dir="2700000" dist="62621" rotWithShape="0">
+              <a:srgbClr val="0c7438">
+                <a:alpha val="60000"/>
+              </a:srgbClr>
+            </a:outerShdw>
+          </a:effectLst>
+        </p:spPr>
+      </p:pic>
+      <p:pic>
+        <p:nvPicPr>
+          <p:cNvPr id="68" name="Picture 17" descr=""/>
+          <p:cNvPicPr/>
+          <p:nvPr/>
+        </p:nvPicPr>
+        <p:blipFill>
+          <a:blip r:embed="rId3"/>
+          <a:stretch/>
+        </p:blipFill>
+        <p:spPr>
+          <a:xfrm>
+            <a:off x="3281040" y="1935720"/>
+            <a:ext cx="2578320" cy="2613960"/>
+          </a:xfrm>
+          <a:prstGeom prst="rect">
+            <a:avLst/>
+          </a:prstGeom>
+          <a:ln w="0">
+            <a:noFill/>
+          </a:ln>
+          <a:effectLst>
+            <a:outerShdw algn="tl" dir="2700000" dist="62621" rotWithShape="0">
+              <a:srgbClr val="0c7438">
+                <a:alpha val="60000"/>
+              </a:srgbClr>
+            </a:outerShdw>
+          </a:effectLst>
+        </p:spPr>
+      </p:pic>
+      <p:pic>
+        <p:nvPicPr>
+          <p:cNvPr id="69" name="Picture 21" descr=""/>
+          <p:cNvPicPr/>
+          <p:nvPr/>
+        </p:nvPicPr>
+        <p:blipFill>
+          <a:blip r:embed="rId4"/>
+          <a:stretch/>
+        </p:blipFill>
+        <p:spPr>
+          <a:xfrm>
+            <a:off x="6130080" y="1488600"/>
+            <a:ext cx="2574720" cy="2350440"/>
+          </a:xfrm>
+          <a:prstGeom prst="rect">
+            <a:avLst/>
+          </a:prstGeom>
+          <a:ln w="0">
+            <a:noFill/>
+          </a:ln>
+          <a:effectLst>
+            <a:outerShdw algn="tl" dir="2700000" dist="62621" rotWithShape="0">
+              <a:srgbClr val="0c7438">
+                <a:alpha val="60000"/>
+              </a:srgbClr>
+            </a:outerShdw>
+          </a:effectLst>
+        </p:spPr>
+      </p:pic>
+    </p:spTree>
+  </p:cSld>
+  <mc:AlternateContent>
+    <mc:Choice Requires="p14">
+      <p:transition spd="slow" p14:dur="2000"/>
+    </mc:Choice>
+    <mc:Fallback>
+      <p:transition spd="slow"/>
+    </mc:Fallback>
+  </mc:AlternateContent>
+  <p:timing>
+    <p:tnLst>
+      <p:par>
+        <p:cTn id="152" dur="indefinite" restart="never" nodeType="tmRoot">
+          <p:childTnLst>
+            <p:seq>
+              <p:cTn id="153" dur="indefinite" nodeType="mainSeq">
+                <p:childTnLst>
+                  <p:par>
+                    <p:cTn id="154" fill="hold">
+                      <p:stCondLst>
+                        <p:cond delay="0"/>
+                      </p:stCondLst>
+                      <p:childTnLst>
+                        <p:par>
+                          <p:cTn id="155" fill="hold">
+                            <p:stCondLst>
+                              <p:cond delay="0"/>
+                            </p:stCondLst>
+                            <p:childTnLst>
+                              <p:par>
+                                <p:cTn id="156" nodeType="withEffect" fill="hold" presetClass="entr" presetID="10">
+                                  <p:stCondLst>
+                                    <p:cond delay="0"/>
+                                  </p:stCondLst>
+                                  <p:childTnLst>
+                                    <p:set>
+                                      <p:cBhvr>
+                                        <p:cTn id="157" dur="1" fill="hold">
+                                          <p:stCondLst>
+                                            <p:cond delay="0"/>
+                                          </p:stCondLst>
+                                        </p:cTn>
+                                        <p:tgtEl>
+                                          <p:spTgt spid="66"/>
+                                        </p:tgtEl>
+                                        <p:attrNameLst>
+                                          <p:attrName>style.visibility</p:attrName>
+                                        </p:attrNameLst>
+                                      </p:cBhvr>
+                                      <p:to>
+                                        <p:strVal val="visible"/>
+                                      </p:to>
+                                    </p:set>
+                                    <p:animEffect filter="fade" transition="in">
+                                      <p:cBhvr additive="repl">
+                                        <p:cTn id="158" dur="500"/>
+                                        <p:tgtEl>
+                                          <p:spTgt spid="66"/>
+                                        </p:tgtEl>
+                                      </p:cBhvr>
+                                    </p:animEffect>
+                                  </p:childTnLst>
+                                </p:cTn>
+                              </p:par>
+                            </p:childTnLst>
+                          </p:cTn>
+                        </p:par>
+                      </p:childTnLst>
+                    </p:cTn>
+                  </p:par>
+                  <p:par>
+                    <p:cTn id="159" fill="hold">
+                      <p:stCondLst>
+                        <p:cond delay="indefinite"/>
+                      </p:stCondLst>
+                      <p:childTnLst>
+                        <p:par>
+                          <p:cTn id="160" fill="hold">
+                            <p:stCondLst>
+                              <p:cond delay="0"/>
+                            </p:stCondLst>
+                            <p:childTnLst>
+                              <p:par>
+                                <p:cTn id="161" nodeType="clickEffect" fill="hold" presetClass="entr" presetID="2" presetSubtype="8">
+                                  <p:stCondLst>
+                                    <p:cond delay="0"/>
+                                  </p:stCondLst>
+                                  <p:childTnLst>
+                                    <p:set>
+                                      <p:cBhvr>
+                                        <p:cTn id="162" dur="1" fill="hold">
+                                          <p:stCondLst>
+                                            <p:cond delay="0"/>
+                                          </p:stCondLst>
+                                        </p:cTn>
+                                        <p:tgtEl>
+                                          <p:spTgt spid="67"/>
+                                        </p:tgtEl>
+                                        <p:attrNameLst>
+                                          <p:attrName>style.visibility</p:attrName>
+                                        </p:attrNameLst>
+                                      </p:cBhvr>
+                                      <p:to>
+                                        <p:strVal val="visible"/>
+                                      </p:to>
+                                    </p:set>
+                                    <p:anim calcmode="lin" valueType="num">
+                                      <p:cBhvr additive="repl">
+                                        <p:cTn id="163" dur="500" fill="hold"/>
+                                        <p:tgtEl>
+                                          <p:spTgt spid="67"/>
+                                        </p:tgtEl>
+                                        <p:attrNameLst>
+                                          <p:attrName>ppt_x</p:attrName>
+                                        </p:attrNameLst>
+                                      </p:cBhvr>
+                                      <p:tavLst>
+                                        <p:tav tm="0">
+                                          <p:val>
+                                            <p:strVal val="0-#ppt_w/2"/>
+                                          </p:val>
+                                        </p:tav>
+                                        <p:tav tm="100000">
+                                          <p:val>
+                                            <p:strVal val="#ppt_x"/>
+                                          </p:val>
+                                        </p:tav>
+                                      </p:tavLst>
+                                    </p:anim>
+                                    <p:anim calcmode="lin" valueType="num">
+                                      <p:cBhvr additive="repl">
+                                        <p:cTn id="164" dur="500" fill="hold"/>
+                                        <p:tgtEl>
+                                          <p:spTgt spid="67"/>
+                                        </p:tgtEl>
+                                        <p:attrNameLst>
+                                          <p:attrName>ppt_y</p:attrName>
+                                        </p:attrNameLst>
+                                      </p:cBhvr>
+                                      <p:tavLst>
+                                        <p:tav tm="0">
+                                          <p:val>
+                                            <p:strVal val="#ppt_y"/>
+                                          </p:val>
+                                        </p:tav>
+                                        <p:tav tm="100000">
+                                          <p:val>
+                                            <p:strVal val="#ppt_y"/>
+                                          </p:val>
+                                        </p:tav>
+                                      </p:tavLst>
+                                    </p:anim>
+                                  </p:childTnLst>
+                                </p:cTn>
+                              </p:par>
+                            </p:childTnLst>
+                          </p:cTn>
+                        </p:par>
+                      </p:childTnLst>
+                    </p:cTn>
+                  </p:par>
+                  <p:par>
+                    <p:cTn id="165" fill="hold">
+                      <p:stCondLst>
+                        <p:cond delay="indefinite"/>
+                      </p:stCondLst>
+                      <p:childTnLst>
+                        <p:par>
+                          <p:cTn id="166" fill="hold">
+                            <p:stCondLst>
+                              <p:cond delay="0"/>
+                            </p:stCondLst>
+                            <p:childTnLst>
+                              <p:par>
+                                <p:cTn id="167" nodeType="clickEffect" fill="hold" presetClass="entr" presetID="2" presetSubtype="4">
+                                  <p:stCondLst>
+                                    <p:cond delay="0"/>
+                                  </p:stCondLst>
+                                  <p:childTnLst>
+                                    <p:set>
+                                      <p:cBhvr>
+                                        <p:cTn id="168" dur="1" fill="hold">
+                                          <p:stCondLst>
+                                            <p:cond delay="0"/>
+                                          </p:stCondLst>
+                                        </p:cTn>
+                                        <p:tgtEl>
+                                          <p:spTgt spid="68"/>
+                                        </p:tgtEl>
+                                        <p:attrNameLst>
+                                          <p:attrName>style.visibility</p:attrName>
+                                        </p:attrNameLst>
+                                      </p:cBhvr>
+                                      <p:to>
+                                        <p:strVal val="visible"/>
+                                      </p:to>
+                                    </p:set>
+                                    <p:anim calcmode="lin" valueType="num">
+                                      <p:cBhvr additive="repl">
+                                        <p:cTn id="169" dur="500" fill="hold"/>
+                                        <p:tgtEl>
+                                          <p:spTgt spid="68"/>
+                                        </p:tgtEl>
+                                        <p:attrNameLst>
+                                          <p:attrName>ppt_x</p:attrName>
+                                        </p:attrNameLst>
+                                      </p:cBhvr>
+                                      <p:tavLst>
+                                        <p:tav tm="0">
+                                          <p:val>
+                                            <p:strVal val="#ppt_x"/>
+                                          </p:val>
+                                        </p:tav>
+                                        <p:tav tm="100000">
+                                          <p:val>
+                                            <p:strVal val="#ppt_x"/>
+                                          </p:val>
+                                        </p:tav>
+                                      </p:tavLst>
+                                    </p:anim>
+                                    <p:anim calcmode="lin" valueType="num">
+                                      <p:cBhvr additive="repl">
+                                        <p:cTn id="170" dur="500" fill="hold"/>
+                                        <p:tgtEl>
+                                          <p:spTgt spid="68"/>
+                                        </p:tgtEl>
+                                        <p:attrNameLst>
+                                          <p:attrName>ppt_y</p:attrName>
+                                        </p:attrNameLst>
+                                      </p:cBhvr>
+                                      <p:tavLst>
+                                        <p:tav tm="0">
+                                          <p:val>
+                                            <p:strVal val="1+#ppt_h/2"/>
+                                          </p:val>
+                                        </p:tav>
+                                        <p:tav tm="100000">
+                                          <p:val>
+                                            <p:strVal val="#ppt_y"/>
+                                          </p:val>
+                                        </p:tav>
+                                      </p:tavLst>
+                                    </p:anim>
+                                  </p:childTnLst>
+                                </p:cTn>
+                              </p:par>
+                            </p:childTnLst>
+                          </p:cTn>
+                        </p:par>
+                      </p:childTnLst>
+                    </p:cTn>
+                  </p:par>
+                  <p:par>
+                    <p:cTn id="171" fill="hold">
+                      <p:stCondLst>
+                        <p:cond delay="indefinite"/>
+                      </p:stCondLst>
+                      <p:childTnLst>
+                        <p:par>
+                          <p:cTn id="172" fill="hold">
+                            <p:stCondLst>
+                              <p:cond delay="0"/>
+                            </p:stCondLst>
+                            <p:childTnLst>
+                              <p:par>
+                                <p:cTn id="173" nodeType="clickEffect" fill="hold" presetClass="entr" presetID="2" presetSubtype="3">
+                                  <p:stCondLst>
+                                    <p:cond delay="0"/>
+                                  </p:stCondLst>
+                                  <p:childTnLst>
+                                    <p:set>
+                                      <p:cBhvr>
+                                        <p:cTn id="174" dur="1" fill="hold">
+                                          <p:stCondLst>
+                                            <p:cond delay="0"/>
+                                          </p:stCondLst>
+                                        </p:cTn>
+                                        <p:tgtEl>
+                                          <p:spTgt spid="69"/>
+                                        </p:tgtEl>
+                                        <p:attrNameLst>
+                                          <p:attrName>style.visibility</p:attrName>
+                                        </p:attrNameLst>
+                                      </p:cBhvr>
+                                      <p:to>
+                                        <p:strVal val="visible"/>
+                                      </p:to>
+                                    </p:set>
+                                    <p:anim calcmode="lin" valueType="num">
+                                      <p:cBhvr additive="repl">
+                                        <p:cTn id="175" dur="500" fill="hold"/>
+                                        <p:tgtEl>
+                                          <p:spTgt spid="69"/>
+                                        </p:tgtEl>
+                                        <p:attrNameLst>
+                                          <p:attrName>ppt_x</p:attrName>
+                                        </p:attrNameLst>
+                                      </p:cBhvr>
+                                      <p:tavLst>
+                                        <p:tav tm="0">
+                                          <p:val>
+                                            <p:strVal val="1+#ppt_w/2"/>
+                                          </p:val>
+                                        </p:tav>
+                                        <p:tav tm="100000">
+                                          <p:val>
+                                            <p:strVal val="#ppt_x"/>
+                                          </p:val>
+                                        </p:tav>
+                                      </p:tavLst>
+                                    </p:anim>
+                                    <p:anim calcmode="lin" valueType="num">
+                                      <p:cBhvr additive="repl">
+                                        <p:cTn id="176" dur="500" fill="hold"/>
+                                        <p:tgtEl>
+                                          <p:spTgt spid="69"/>
+                                        </p:tgtEl>
+                                        <p:attrNameLst>
+                                          <p:attrName>ppt_y</p:attrName>
+                                        </p:attrNameLst>
+                                      </p:cBhvr>
+                                      <p:tavLst>
+                                        <p:tav tm="0">
+                                          <p:val>
+                                            <p:strVal val="0-#ppt_h/2"/>
                                           </p:val>
                                         </p:tav>
                                         <p:tav tm="100000">
@@ -3149,7 +3153,7 @@
       </p:grpSpPr>
       <p:pic>
         <p:nvPicPr>
-          <p:cNvPr id="68" name="Picture 4" descr=""/>
+          <p:cNvPr id="70" name="Picture 8" descr="A black and white background with black text&#10;&#10;Description automatically generated"/>
           <p:cNvPicPr/>
           <p:nvPr/>
         </p:nvPicPr>
@@ -3159,8 +3163,8 @@
         </p:blipFill>
         <p:spPr>
           <a:xfrm>
-            <a:off x="685800" y="1638000"/>
-            <a:ext cx="7771680" cy="1866960"/>
+            <a:off x="657000" y="336240"/>
+            <a:ext cx="5186880" cy="3068640"/>
           </a:xfrm>
           <a:prstGeom prst="rect">
             <a:avLst/>
@@ -3172,7 +3176,7 @@
       </p:pic>
       <p:pic>
         <p:nvPicPr>
-          <p:cNvPr id="69" name="Picture 6" descr=""/>
+          <p:cNvPr id="71" name="Picture 9" descr=""/>
           <p:cNvPicPr/>
           <p:nvPr/>
         </p:nvPicPr>
@@ -3182,8 +3186,8 @@
         </p:blipFill>
         <p:spPr>
           <a:xfrm>
-            <a:off x="449280" y="592560"/>
-            <a:ext cx="2579040" cy="2583000"/>
+            <a:off x="5213520" y="2887920"/>
+            <a:ext cx="3093120" cy="1601640"/>
           </a:xfrm>
           <a:prstGeom prst="rect">
             <a:avLst/>
@@ -3194,7 +3198,7 @@
           <a:effectLst>
             <a:outerShdw algn="tl" dir="2700000" dist="62621" rotWithShape="0">
               <a:srgbClr val="0c7438">
-                <a:alpha val="60000"/>
+                <a:alpha val="50000"/>
               </a:srgbClr>
             </a:outerShdw>
           </a:effectLst>
@@ -3202,7 +3206,7 @@
       </p:pic>
       <p:pic>
         <p:nvPicPr>
-          <p:cNvPr id="70" name="Picture 17" descr=""/>
+          <p:cNvPr id="72" name="Picture 10" descr="A pixelated hand pointing up&#10;&#10;Description automatically generated"/>
           <p:cNvPicPr/>
           <p:nvPr/>
         </p:nvPicPr>
@@ -3212,52 +3216,15 @@
         </p:blipFill>
         <p:spPr>
           <a:xfrm>
-            <a:off x="3281040" y="1935720"/>
-            <a:ext cx="2579040" cy="2614680"/>
-          </a:xfrm>
-          <a:prstGeom prst="rect">
-            <a:avLst/>
-          </a:prstGeom>
-          <a:ln w="0">
-            <a:noFill/>
-          </a:ln>
-          <a:effectLst>
-            <a:outerShdw algn="tl" dir="2700000" dist="62621" rotWithShape="0">
-              <a:srgbClr val="0c7438">
-                <a:alpha val="60000"/>
-              </a:srgbClr>
-            </a:outerShdw>
-          </a:effectLst>
-        </p:spPr>
-      </p:pic>
-      <p:pic>
-        <p:nvPicPr>
-          <p:cNvPr id="71" name="Picture 21" descr=""/>
-          <p:cNvPicPr/>
-          <p:nvPr/>
-        </p:nvPicPr>
-        <p:blipFill>
-          <a:blip r:embed="rId4"/>
-          <a:stretch/>
-        </p:blipFill>
-        <p:spPr>
-          <a:xfrm>
-            <a:off x="6130080" y="1488600"/>
-            <a:ext cx="2575440" cy="2351160"/>
-          </a:xfrm>
-          <a:prstGeom prst="rect">
-            <a:avLst/>
-          </a:prstGeom>
-          <a:ln w="0">
-            <a:noFill/>
-          </a:ln>
-          <a:effectLst>
-            <a:outerShdw algn="tl" dir="2700000" dist="62621" rotWithShape="0">
-              <a:srgbClr val="0c7438">
-                <a:alpha val="60000"/>
-              </a:srgbClr>
-            </a:outerShdw>
-          </a:effectLst>
+            <a:off x="6108840" y="4141080"/>
+            <a:ext cx="222480" cy="302760"/>
+          </a:xfrm>
+          <a:prstGeom prst="rect">
+            <a:avLst/>
+          </a:prstGeom>
+          <a:ln w="0">
+            <a:noFill/>
+          </a:ln>
         </p:spPr>
       </p:pic>
     </p:spTree>
@@ -3273,91 +3240,38 @@
   <p:timing>
     <p:tnLst>
       <p:par>
-        <p:cTn id="164" dur="indefinite" restart="never" nodeType="tmRoot">
+        <p:cTn id="177" dur="indefinite" restart="never" nodeType="tmRoot">
           <p:childTnLst>
             <p:seq>
-              <p:cTn id="165" dur="indefinite" nodeType="mainSeq">
+              <p:cTn id="178" dur="indefinite" nodeType="mainSeq">
                 <p:childTnLst>
                   <p:par>
-                    <p:cTn id="166" fill="hold">
+                    <p:cTn id="179" fill="hold">
                       <p:stCondLst>
                         <p:cond delay="0"/>
                       </p:stCondLst>
                       <p:childTnLst>
                         <p:par>
-                          <p:cTn id="167" fill="hold">
+                          <p:cTn id="180" fill="hold">
                             <p:stCondLst>
                               <p:cond delay="0"/>
                             </p:stCondLst>
                             <p:childTnLst>
                               <p:par>
-                                <p:cTn id="168" nodeType="withEffect" fill="hold" presetClass="entr" presetID="10">
+                                <p:cTn id="181" nodeType="afterEffect" fill="hold" presetClass="entr" presetID="2" presetSubtype="1">
                                   <p:stCondLst>
                                     <p:cond delay="0"/>
                                   </p:stCondLst>
                                   <p:childTnLst>
                                     <p:set>
                                       <p:cBhvr>
-                                        <p:cTn id="169" dur="1" fill="hold">
+                                        <p:cTn id="182" dur="1" fill="hold">
                                           <p:stCondLst>
                                             <p:cond delay="0"/>
                                           </p:stCondLst>
                                         </p:cTn>
                                         <p:tgtEl>
-                                          <p:spTgt spid="68"/>
-                                        </p:tgtEl>
-                                        <p:attrNameLst>
-                                          <p:attrName>style.visibility</p:attrName>
-                                        </p:attrNameLst>
-                                      </p:cBhvr>
-                                      <p:to>
-                                        <p:strVal val="visible"/>
-                                      </p:to>
-                                    </p:set>
-                                    <p:animEffect filter="fade" transition="in">
-                                      <p:cBhvr additive="repl">
-                                        <p:cTn id="170" dur="500"/>
-                                        <p:tgtEl>
-                                          <p:spTgt spid="68"/>
-                                        </p:tgtEl>
-                                      </p:cBhvr>
-                                    </p:animEffect>
-                                  </p:childTnLst>
-                                </p:cTn>
-                              </p:par>
-                            </p:childTnLst>
-                          </p:cTn>
-                        </p:par>
-                      </p:childTnLst>
-                    </p:cTn>
-                  </p:par>
-                  <p:par>
-                    <p:cTn id="171" fill="hold">
-                      <p:stCondLst>
-                        <p:cond delay="indefinite"/>
-                      </p:stCondLst>
-                      <p:childTnLst>
-                        <p:par>
-                          <p:cTn id="172" fill="hold">
-                            <p:stCondLst>
-                              <p:cond delay="0"/>
-                            </p:stCondLst>
-                            <p:childTnLst>
-                              <p:par>
-                                <p:cTn id="173" nodeType="clickEffect" fill="hold" presetClass="entr" presetID="2" presetSubtype="8">
-                                  <p:stCondLst>
-                                    <p:cond delay="0"/>
-                                  </p:stCondLst>
-                                  <p:childTnLst>
-                                    <p:set>
-                                      <p:cBhvr>
-                                        <p:cTn id="174" dur="1" fill="hold">
-                                          <p:stCondLst>
-                                            <p:cond delay="0"/>
-                                          </p:stCondLst>
-                                        </p:cTn>
-                                        <p:tgtEl>
-                                          <p:spTgt spid="69"/>
+                                          <p:spTgt spid="70"/>
                                         </p:tgtEl>
                                         <p:attrNameLst>
                                           <p:attrName>style.visibility</p:attrName>
@@ -3369,9 +3283,9 @@
                                     </p:set>
                                     <p:anim calcmode="lin" valueType="num">
                                       <p:cBhvr additive="repl">
-                                        <p:cTn id="175" dur="500" fill="hold"/>
-                                        <p:tgtEl>
-                                          <p:spTgt spid="69"/>
+                                        <p:cTn id="183" dur="500" fill="hold"/>
+                                        <p:tgtEl>
+                                          <p:spTgt spid="70"/>
                                         </p:tgtEl>
                                         <p:attrNameLst>
                                           <p:attrName>ppt_x</p:attrName>
@@ -3380,7 +3294,7 @@
                                       <p:tavLst>
                                         <p:tav tm="0">
                                           <p:val>
-                                            <p:strVal val="0-#ppt_w/2"/>
+                                            <p:strVal val="#ppt_x"/>
                                           </p:val>
                                         </p:tav>
                                         <p:tav tm="100000">
@@ -3392,418 +3306,9 @@
                                     </p:anim>
                                     <p:anim calcmode="lin" valueType="num">
                                       <p:cBhvr additive="repl">
-                                        <p:cTn id="176" dur="500" fill="hold"/>
-                                        <p:tgtEl>
-                                          <p:spTgt spid="69"/>
-                                        </p:tgtEl>
-                                        <p:attrNameLst>
-                                          <p:attrName>ppt_y</p:attrName>
-                                        </p:attrNameLst>
-                                      </p:cBhvr>
-                                      <p:tavLst>
-                                        <p:tav tm="0">
-                                          <p:val>
-                                            <p:strVal val="#ppt_y"/>
-                                          </p:val>
-                                        </p:tav>
-                                        <p:tav tm="100000">
-                                          <p:val>
-                                            <p:strVal val="#ppt_y"/>
-                                          </p:val>
-                                        </p:tav>
-                                      </p:tavLst>
-                                    </p:anim>
-                                  </p:childTnLst>
-                                </p:cTn>
-                              </p:par>
-                            </p:childTnLst>
-                          </p:cTn>
-                        </p:par>
-                      </p:childTnLst>
-                    </p:cTn>
-                  </p:par>
-                  <p:par>
-                    <p:cTn id="177" fill="hold">
-                      <p:stCondLst>
-                        <p:cond delay="indefinite"/>
-                      </p:stCondLst>
-                      <p:childTnLst>
-                        <p:par>
-                          <p:cTn id="178" fill="hold">
-                            <p:stCondLst>
-                              <p:cond delay="0"/>
-                            </p:stCondLst>
-                            <p:childTnLst>
-                              <p:par>
-                                <p:cTn id="179" nodeType="clickEffect" fill="hold" presetClass="entr" presetID="2" presetSubtype="4">
-                                  <p:stCondLst>
-                                    <p:cond delay="0"/>
-                                  </p:stCondLst>
-                                  <p:childTnLst>
-                                    <p:set>
-                                      <p:cBhvr>
-                                        <p:cTn id="180" dur="1" fill="hold">
-                                          <p:stCondLst>
-                                            <p:cond delay="0"/>
-                                          </p:stCondLst>
-                                        </p:cTn>
+                                        <p:cTn id="184" dur="500" fill="hold"/>
                                         <p:tgtEl>
                                           <p:spTgt spid="70"/>
-                                        </p:tgtEl>
-                                        <p:attrNameLst>
-                                          <p:attrName>style.visibility</p:attrName>
-                                        </p:attrNameLst>
-                                      </p:cBhvr>
-                                      <p:to>
-                                        <p:strVal val="visible"/>
-                                      </p:to>
-                                    </p:set>
-                                    <p:anim calcmode="lin" valueType="num">
-                                      <p:cBhvr additive="repl">
-                                        <p:cTn id="181" dur="500" fill="hold"/>
-                                        <p:tgtEl>
-                                          <p:spTgt spid="70"/>
-                                        </p:tgtEl>
-                                        <p:attrNameLst>
-                                          <p:attrName>ppt_x</p:attrName>
-                                        </p:attrNameLst>
-                                      </p:cBhvr>
-                                      <p:tavLst>
-                                        <p:tav tm="0">
-                                          <p:val>
-                                            <p:strVal val="#ppt_x"/>
-                                          </p:val>
-                                        </p:tav>
-                                        <p:tav tm="100000">
-                                          <p:val>
-                                            <p:strVal val="#ppt_x"/>
-                                          </p:val>
-                                        </p:tav>
-                                      </p:tavLst>
-                                    </p:anim>
-                                    <p:anim calcmode="lin" valueType="num">
-                                      <p:cBhvr additive="repl">
-                                        <p:cTn id="182" dur="500" fill="hold"/>
-                                        <p:tgtEl>
-                                          <p:spTgt spid="70"/>
-                                        </p:tgtEl>
-                                        <p:attrNameLst>
-                                          <p:attrName>ppt_y</p:attrName>
-                                        </p:attrNameLst>
-                                      </p:cBhvr>
-                                      <p:tavLst>
-                                        <p:tav tm="0">
-                                          <p:val>
-                                            <p:strVal val="1+#ppt_h/2"/>
-                                          </p:val>
-                                        </p:tav>
-                                        <p:tav tm="100000">
-                                          <p:val>
-                                            <p:strVal val="#ppt_y"/>
-                                          </p:val>
-                                        </p:tav>
-                                      </p:tavLst>
-                                    </p:anim>
-                                  </p:childTnLst>
-                                </p:cTn>
-                              </p:par>
-                            </p:childTnLst>
-                          </p:cTn>
-                        </p:par>
-                      </p:childTnLst>
-                    </p:cTn>
-                  </p:par>
-                  <p:par>
-                    <p:cTn id="183" fill="hold">
-                      <p:stCondLst>
-                        <p:cond delay="indefinite"/>
-                      </p:stCondLst>
-                      <p:childTnLst>
-                        <p:par>
-                          <p:cTn id="184" fill="hold">
-                            <p:stCondLst>
-                              <p:cond delay="0"/>
-                            </p:stCondLst>
-                            <p:childTnLst>
-                              <p:par>
-                                <p:cTn id="185" nodeType="clickEffect" fill="hold" presetClass="entr" presetID="2" presetSubtype="3">
-                                  <p:stCondLst>
-                                    <p:cond delay="0"/>
-                                  </p:stCondLst>
-                                  <p:childTnLst>
-                                    <p:set>
-                                      <p:cBhvr>
-                                        <p:cTn id="186" dur="1" fill="hold">
-                                          <p:stCondLst>
-                                            <p:cond delay="0"/>
-                                          </p:stCondLst>
-                                        </p:cTn>
-                                        <p:tgtEl>
-                                          <p:spTgt spid="71"/>
-                                        </p:tgtEl>
-                                        <p:attrNameLst>
-                                          <p:attrName>style.visibility</p:attrName>
-                                        </p:attrNameLst>
-                                      </p:cBhvr>
-                                      <p:to>
-                                        <p:strVal val="visible"/>
-                                      </p:to>
-                                    </p:set>
-                                    <p:anim calcmode="lin" valueType="num">
-                                      <p:cBhvr additive="repl">
-                                        <p:cTn id="187" dur="500" fill="hold"/>
-                                        <p:tgtEl>
-                                          <p:spTgt spid="71"/>
-                                        </p:tgtEl>
-                                        <p:attrNameLst>
-                                          <p:attrName>ppt_x</p:attrName>
-                                        </p:attrNameLst>
-                                      </p:cBhvr>
-                                      <p:tavLst>
-                                        <p:tav tm="0">
-                                          <p:val>
-                                            <p:strVal val="1+#ppt_w/2"/>
-                                          </p:val>
-                                        </p:tav>
-                                        <p:tav tm="100000">
-                                          <p:val>
-                                            <p:strVal val="#ppt_x"/>
-                                          </p:val>
-                                        </p:tav>
-                                      </p:tavLst>
-                                    </p:anim>
-                                    <p:anim calcmode="lin" valueType="num">
-                                      <p:cBhvr additive="repl">
-                                        <p:cTn id="188" dur="500" fill="hold"/>
-                                        <p:tgtEl>
-                                          <p:spTgt spid="71"/>
-                                        </p:tgtEl>
-                                        <p:attrNameLst>
-                                          <p:attrName>ppt_y</p:attrName>
-                                        </p:attrNameLst>
-                                      </p:cBhvr>
-                                      <p:tavLst>
-                                        <p:tav tm="0">
-                                          <p:val>
-                                            <p:strVal val="0-#ppt_h/2"/>
-                                          </p:val>
-                                        </p:tav>
-                                        <p:tav tm="100000">
-                                          <p:val>
-                                            <p:strVal val="#ppt_y"/>
-                                          </p:val>
-                                        </p:tav>
-                                      </p:tavLst>
-                                    </p:anim>
-                                  </p:childTnLst>
-                                </p:cTn>
-                              </p:par>
-                            </p:childTnLst>
-                          </p:cTn>
-                        </p:par>
-                      </p:childTnLst>
-                    </p:cTn>
-                  </p:par>
-                </p:childTnLst>
-              </p:cTn>
-              <p:prevCondLst>
-                <p:cond evt="onPrev">
-                  <p:tgtEl>
-                    <p:sldTgt/>
-                  </p:tgtEl>
-                </p:cond>
-              </p:prevCondLst>
-              <p:nextCondLst>
-                <p:cond evt="onNext">
-                  <p:tgtEl>
-                    <p:sldTgt/>
-                  </p:tgtEl>
-                </p:cond>
-              </p:nextCondLst>
-            </p:seq>
-          </p:childTnLst>
-        </p:cTn>
-      </p:par>
-    </p:tnLst>
-  </p:timing>
-</p:sld>
-</file>
-
-<file path=ppt/slides/slide14.xml><?xml version="1.0" encoding="utf-8"?>
-<p:sld xmlns:a="http://schemas.openxmlformats.org/drawingml/2006/main" xmlns:p="http://schemas.openxmlformats.org/presentationml/2006/main" xmlns:r="http://schemas.openxmlformats.org/officeDocument/2006/relationships" xmlns:p14="http://schemas.microsoft.com/office/powerpoint/2010/main" xmlns:p15="http://schemas.microsoft.com/office/powerpoint/2012/main" xmlns:mc="http://schemas.openxmlformats.org/markup-compatibility/2006">
-  <p:cSld>
-    <p:spTree>
-      <p:nvGrpSpPr>
-        <p:cNvPr id="1" name=""/>
-        <p:cNvGrpSpPr/>
-        <p:nvPr/>
-      </p:nvGrpSpPr>
-      <p:grpSpPr>
-        <a:xfrm>
-          <a:off x="0" y="0"/>
-          <a:ext cx="0" cy="0"/>
-          <a:chOff x="0" y="0"/>
-          <a:chExt cx="0" cy="0"/>
-        </a:xfrm>
-      </p:grpSpPr>
-      <p:pic>
-        <p:nvPicPr>
-          <p:cNvPr id="72" name="Picture 8" descr="A black and white background with black text&#10;&#10;Description automatically generated"/>
-          <p:cNvPicPr/>
-          <p:nvPr/>
-        </p:nvPicPr>
-        <p:blipFill>
-          <a:blip r:embed="rId1"/>
-          <a:stretch/>
-        </p:blipFill>
-        <p:spPr>
-          <a:xfrm>
-            <a:off x="657000" y="336240"/>
-            <a:ext cx="5187600" cy="3069360"/>
-          </a:xfrm>
-          <a:prstGeom prst="rect">
-            <a:avLst/>
-          </a:prstGeom>
-          <a:ln w="0">
-            <a:noFill/>
-          </a:ln>
-        </p:spPr>
-      </p:pic>
-      <p:pic>
-        <p:nvPicPr>
-          <p:cNvPr id="73" name="Picture 9" descr=""/>
-          <p:cNvPicPr/>
-          <p:nvPr/>
-        </p:nvPicPr>
-        <p:blipFill>
-          <a:blip r:embed="rId2"/>
-          <a:stretch/>
-        </p:blipFill>
-        <p:spPr>
-          <a:xfrm>
-            <a:off x="5213520" y="2887920"/>
-            <a:ext cx="3093840" cy="1602360"/>
-          </a:xfrm>
-          <a:prstGeom prst="rect">
-            <a:avLst/>
-          </a:prstGeom>
-          <a:ln w="0">
-            <a:noFill/>
-          </a:ln>
-          <a:effectLst>
-            <a:outerShdw algn="tl" dir="2700000" dist="62621" rotWithShape="0">
-              <a:srgbClr val="0c7438">
-                <a:alpha val="50000"/>
-              </a:srgbClr>
-            </a:outerShdw>
-          </a:effectLst>
-        </p:spPr>
-      </p:pic>
-      <p:pic>
-        <p:nvPicPr>
-          <p:cNvPr id="74" name="Picture 10" descr="A pixelated hand pointing up&#10;&#10;Description automatically generated"/>
-          <p:cNvPicPr/>
-          <p:nvPr/>
-        </p:nvPicPr>
-        <p:blipFill>
-          <a:blip r:embed="rId3"/>
-          <a:stretch/>
-        </p:blipFill>
-        <p:spPr>
-          <a:xfrm>
-            <a:off x="6108840" y="4141080"/>
-            <a:ext cx="223200" cy="303480"/>
-          </a:xfrm>
-          <a:prstGeom prst="rect">
-            <a:avLst/>
-          </a:prstGeom>
-          <a:ln w="0">
-            <a:noFill/>
-          </a:ln>
-        </p:spPr>
-      </p:pic>
-    </p:spTree>
-  </p:cSld>
-  <mc:AlternateContent>
-    <mc:Choice Requires="p14">
-      <p:transition spd="slow" p14:dur="2000"/>
-    </mc:Choice>
-    <mc:Fallback>
-      <p:transition spd="slow"/>
-    </mc:Fallback>
-  </mc:AlternateContent>
-  <p:timing>
-    <p:tnLst>
-      <p:par>
-        <p:cTn id="189" dur="indefinite" restart="never" nodeType="tmRoot">
-          <p:childTnLst>
-            <p:seq>
-              <p:cTn id="190" dur="indefinite" nodeType="mainSeq">
-                <p:childTnLst>
-                  <p:par>
-                    <p:cTn id="191" fill="hold">
-                      <p:stCondLst>
-                        <p:cond delay="0"/>
-                      </p:stCondLst>
-                      <p:childTnLst>
-                        <p:par>
-                          <p:cTn id="192" fill="hold">
-                            <p:stCondLst>
-                              <p:cond delay="0"/>
-                            </p:stCondLst>
-                            <p:childTnLst>
-                              <p:par>
-                                <p:cTn id="193" nodeType="afterEffect" fill="hold" presetClass="entr" presetID="2" presetSubtype="1">
-                                  <p:stCondLst>
-                                    <p:cond delay="0"/>
-                                  </p:stCondLst>
-                                  <p:childTnLst>
-                                    <p:set>
-                                      <p:cBhvr>
-                                        <p:cTn id="194" dur="1" fill="hold">
-                                          <p:stCondLst>
-                                            <p:cond delay="0"/>
-                                          </p:stCondLst>
-                                        </p:cTn>
-                                        <p:tgtEl>
-                                          <p:spTgt spid="72"/>
-                                        </p:tgtEl>
-                                        <p:attrNameLst>
-                                          <p:attrName>style.visibility</p:attrName>
-                                        </p:attrNameLst>
-                                      </p:cBhvr>
-                                      <p:to>
-                                        <p:strVal val="visible"/>
-                                      </p:to>
-                                    </p:set>
-                                    <p:anim calcmode="lin" valueType="num">
-                                      <p:cBhvr additive="repl">
-                                        <p:cTn id="195" dur="500" fill="hold"/>
-                                        <p:tgtEl>
-                                          <p:spTgt spid="72"/>
-                                        </p:tgtEl>
-                                        <p:attrNameLst>
-                                          <p:attrName>ppt_x</p:attrName>
-                                        </p:attrNameLst>
-                                      </p:cBhvr>
-                                      <p:tavLst>
-                                        <p:tav tm="0">
-                                          <p:val>
-                                            <p:strVal val="#ppt_x"/>
-                                          </p:val>
-                                        </p:tav>
-                                        <p:tav tm="100000">
-                                          <p:val>
-                                            <p:strVal val="#ppt_x"/>
-                                          </p:val>
-                                        </p:tav>
-                                      </p:tavLst>
-                                    </p:anim>
-                                    <p:anim calcmode="lin" valueType="num">
-                                      <p:cBhvr additive="repl">
-                                        <p:cTn id="196" dur="500" fill="hold"/>
-                                        <p:tgtEl>
-                                          <p:spTgt spid="72"/>
                                         </p:tgtEl>
                                         <p:attrNameLst>
                                           <p:attrName>ppt_y</p:attrName>
@@ -3829,26 +3334,26 @@
                           </p:cTn>
                         </p:par>
                         <p:par>
-                          <p:cTn id="197" fill="hold">
+                          <p:cTn id="185" fill="hold">
                             <p:stCondLst>
                               <p:cond delay="500"/>
                             </p:stCondLst>
                             <p:childTnLst>
                               <p:par>
-                                <p:cTn id="198" nodeType="afterEffect" fill="hold" presetClass="entr" presetID="2" presetSubtype="2">
+                                <p:cTn id="186" nodeType="afterEffect" fill="hold" presetClass="entr" presetID="2" presetSubtype="2">
                                   <p:stCondLst>
                                     <p:cond delay="500"/>
                                   </p:stCondLst>
                                   <p:childTnLst>
                                     <p:set>
                                       <p:cBhvr>
-                                        <p:cTn id="199" dur="1" fill="hold">
+                                        <p:cTn id="187" dur="1" fill="hold">
                                           <p:stCondLst>
                                             <p:cond delay="0"/>
                                           </p:stCondLst>
                                         </p:cTn>
                                         <p:tgtEl>
-                                          <p:spTgt spid="73"/>
+                                          <p:spTgt spid="71"/>
                                         </p:tgtEl>
                                         <p:attrNameLst>
                                           <p:attrName>style.visibility</p:attrName>
@@ -3860,9 +3365,9 @@
                                     </p:set>
                                     <p:anim calcmode="lin" valueType="num">
                                       <p:cBhvr additive="repl">
-                                        <p:cTn id="200" dur="500" fill="hold"/>
-                                        <p:tgtEl>
-                                          <p:spTgt spid="73"/>
+                                        <p:cTn id="188" dur="500" fill="hold"/>
+                                        <p:tgtEl>
+                                          <p:spTgt spid="71"/>
                                         </p:tgtEl>
                                         <p:attrNameLst>
                                           <p:attrName>ppt_x</p:attrName>
@@ -3883,9 +3388,9 @@
                                     </p:anim>
                                     <p:anim calcmode="lin" valueType="num">
                                       <p:cBhvr additive="repl">
-                                        <p:cTn id="201" dur="500" fill="hold"/>
-                                        <p:tgtEl>
-                                          <p:spTgt spid="73"/>
+                                        <p:cTn id="189" dur="500" fill="hold"/>
+                                        <p:tgtEl>
+                                          <p:spTgt spid="71"/>
                                         </p:tgtEl>
                                         <p:attrNameLst>
                                           <p:attrName>ppt_y</p:attrName>
@@ -3911,26 +3416,26 @@
                           </p:cTn>
                         </p:par>
                         <p:par>
-                          <p:cTn id="202" fill="hold">
+                          <p:cTn id="190" fill="hold">
                             <p:stCondLst>
                               <p:cond delay="1500"/>
                             </p:stCondLst>
                             <p:childTnLst>
                               <p:par>
-                                <p:cTn id="203" nodeType="afterEffect" fill="hold" presetClass="entr" presetID="2" presetSubtype="4">
+                                <p:cTn id="191" nodeType="afterEffect" fill="hold" presetClass="entr" presetID="2" presetSubtype="4">
                                   <p:stCondLst>
                                     <p:cond delay="0"/>
                                   </p:stCondLst>
                                   <p:childTnLst>
                                     <p:set>
                                       <p:cBhvr>
-                                        <p:cTn id="204" dur="1" fill="hold">
+                                        <p:cTn id="192" dur="1" fill="hold">
                                           <p:stCondLst>
                                             <p:cond delay="0"/>
                                           </p:stCondLst>
                                         </p:cTn>
                                         <p:tgtEl>
-                                          <p:spTgt spid="74"/>
+                                          <p:spTgt spid="72"/>
                                         </p:tgtEl>
                                         <p:attrNameLst>
                                           <p:attrName>style.visibility</p:attrName>
@@ -3942,9 +3447,9 @@
                                     </p:set>
                                     <p:anim calcmode="lin" valueType="num">
                                       <p:cBhvr additive="repl">
-                                        <p:cTn id="205" dur="500" fill="hold"/>
-                                        <p:tgtEl>
-                                          <p:spTgt spid="74"/>
+                                        <p:cTn id="193" dur="500" fill="hold"/>
+                                        <p:tgtEl>
+                                          <p:spTgt spid="72"/>
                                         </p:tgtEl>
                                         <p:attrNameLst>
                                           <p:attrName>ppt_x</p:attrName>
@@ -3965,9 +3470,9 @@
                                     </p:anim>
                                     <p:anim calcmode="lin" valueType="num">
                                       <p:cBhvr additive="repl">
-                                        <p:cTn id="206" dur="500" fill="hold"/>
-                                        <p:tgtEl>
-                                          <p:spTgt spid="74"/>
+                                        <p:cTn id="194" dur="500" fill="hold"/>
+                                        <p:tgtEl>
+                                          <p:spTgt spid="72"/>
                                         </p:tgtEl>
                                         <p:attrNameLst>
                                           <p:attrName>ppt_y</p:attrName>
@@ -4050,7 +3555,7 @@
         <p:spPr>
           <a:xfrm>
             <a:off x="878760" y="1624320"/>
-            <a:ext cx="7771680" cy="1893960"/>
+            <a:ext cx="7770960" cy="1893240"/>
           </a:xfrm>
           <a:prstGeom prst="rect">
             <a:avLst/>
@@ -4073,7 +3578,7 @@
         <p:spPr>
           <a:xfrm>
             <a:off x="1707120" y="249120"/>
-            <a:ext cx="2375280" cy="1272240"/>
+            <a:ext cx="2374560" cy="1271520"/>
           </a:xfrm>
           <a:prstGeom prst="rect">
             <a:avLst/>
@@ -4103,7 +3608,7 @@
         <p:spPr>
           <a:xfrm>
             <a:off x="350640" y="1715400"/>
-            <a:ext cx="2375280" cy="2165400"/>
+            <a:ext cx="2374560" cy="2164680"/>
           </a:xfrm>
           <a:prstGeom prst="rect">
             <a:avLst/>
@@ -4133,7 +3638,7 @@
         <p:spPr>
           <a:xfrm>
             <a:off x="1369800" y="3170520"/>
-            <a:ext cx="2375280" cy="2169000"/>
+            <a:ext cx="2374560" cy="2168280"/>
           </a:xfrm>
           <a:prstGeom prst="rect">
             <a:avLst/>
@@ -4163,7 +3668,7 @@
         <p:spPr>
           <a:xfrm>
             <a:off x="4611600" y="131400"/>
-            <a:ext cx="2375280" cy="2165400"/>
+            <a:ext cx="2374560" cy="2164680"/>
           </a:xfrm>
           <a:prstGeom prst="rect">
             <a:avLst/>
@@ -4193,7 +3698,7 @@
         <p:spPr>
           <a:xfrm>
             <a:off x="4083120" y="2835720"/>
-            <a:ext cx="2375280" cy="2161800"/>
+            <a:ext cx="2374560" cy="2161080"/>
           </a:xfrm>
           <a:prstGeom prst="rect">
             <a:avLst/>
@@ -4223,7 +3728,7 @@
         <p:spPr>
           <a:xfrm>
             <a:off x="6578640" y="1828800"/>
-            <a:ext cx="2375280" cy="2165400"/>
+            <a:ext cx="2374560" cy="2164680"/>
           </a:xfrm>
           <a:prstGeom prst="rect">
             <a:avLst/>
@@ -4912,7 +4417,7 @@
         <p:spPr>
           <a:xfrm>
             <a:off x="1357920" y="555120"/>
-            <a:ext cx="6254640" cy="3696120"/>
+            <a:ext cx="6253920" cy="3695400"/>
           </a:xfrm>
           <a:prstGeom prst="rect">
             <a:avLst/>
@@ -5093,7 +4598,7 @@
         <p:spPr>
           <a:xfrm>
             <a:off x="886320" y="804240"/>
-            <a:ext cx="7371000" cy="2706120"/>
+            <a:ext cx="7370280" cy="2705400"/>
           </a:xfrm>
           <a:prstGeom prst="rect">
             <a:avLst/>
@@ -5123,7 +4628,7 @@
         <p:spPr>
           <a:xfrm>
             <a:off x="3746880" y="3184920"/>
-            <a:ext cx="2784600" cy="1440720"/>
+            <a:ext cx="2783880" cy="1440000"/>
           </a:xfrm>
           <a:prstGeom prst="rect">
             <a:avLst/>
@@ -5153,7 +4658,7 @@
         <p:spPr>
           <a:xfrm>
             <a:off x="5324400" y="4390560"/>
-            <a:ext cx="223200" cy="303480"/>
+            <a:ext cx="222480" cy="302760"/>
           </a:xfrm>
           <a:prstGeom prst="rect">
             <a:avLst/>
@@ -5482,7 +4987,7 @@
         <p:spPr>
           <a:xfrm>
             <a:off x="1860480" y="1116360"/>
-            <a:ext cx="6065280" cy="1811520"/>
+            <a:ext cx="6064560" cy="1810800"/>
           </a:xfrm>
           <a:prstGeom prst="rect">
             <a:avLst/>
@@ -5512,7 +5017,7 @@
         <p:spPr>
           <a:xfrm>
             <a:off x="1017000" y="2637720"/>
-            <a:ext cx="3175560" cy="1638360"/>
+            <a:ext cx="3174840" cy="1637640"/>
           </a:xfrm>
           <a:prstGeom prst="rect">
             <a:avLst/>
@@ -5542,7 +5047,7 @@
         <p:spPr>
           <a:xfrm>
             <a:off x="2864520" y="3972240"/>
-            <a:ext cx="223200" cy="303480"/>
+            <a:ext cx="222480" cy="302760"/>
           </a:xfrm>
           <a:prstGeom prst="rect">
             <a:avLst/>
@@ -5871,7 +5376,7 @@
         <p:spPr>
           <a:xfrm>
             <a:off x="2158920" y="1320480"/>
-            <a:ext cx="4825440" cy="2501640"/>
+            <a:ext cx="4824720" cy="2500920"/>
           </a:xfrm>
           <a:prstGeom prst="rect">
             <a:avLst/>
@@ -5894,7 +5399,7 @@
         <p:spPr>
           <a:xfrm>
             <a:off x="4460040" y="3421440"/>
-            <a:ext cx="223200" cy="303480"/>
+            <a:ext cx="222480" cy="302760"/>
           </a:xfrm>
           <a:prstGeom prst="rect">
             <a:avLst/>
@@ -6141,7 +5646,7 @@
         <p:spPr>
           <a:xfrm>
             <a:off x="3807360" y="369720"/>
-            <a:ext cx="1467360" cy="517680"/>
+            <a:ext cx="1466640" cy="516960"/>
           </a:xfrm>
           <a:prstGeom prst="rect">
             <a:avLst/>
@@ -6164,7 +5669,7 @@
         <p:spPr>
           <a:xfrm>
             <a:off x="3708360" y="866160"/>
-            <a:ext cx="1665720" cy="1665720"/>
+            <a:ext cx="1665000" cy="1665000"/>
           </a:xfrm>
           <a:prstGeom prst="rect">
             <a:avLst/>
@@ -6187,7 +5692,7 @@
         <p:spPr>
           <a:xfrm>
             <a:off x="3708360" y="3006360"/>
-            <a:ext cx="1665720" cy="1657440"/>
+            <a:ext cx="1665000" cy="1656720"/>
           </a:xfrm>
           <a:prstGeom prst="rect">
             <a:avLst/>
@@ -6210,7 +5715,7 @@
         <p:spPr>
           <a:xfrm>
             <a:off x="4314960" y="2385000"/>
-            <a:ext cx="452520" cy="774000"/>
+            <a:ext cx="451800" cy="773280"/>
           </a:xfrm>
           <a:prstGeom prst="rect">
             <a:avLst/>
@@ -6579,9 +6084,55 @@
           <a:chExt cx="0" cy="0"/>
         </a:xfrm>
       </p:grpSpPr>
+      <p:cxnSp>
+        <p:nvCxnSpPr>
+          <p:cNvPr id="32" name="Straight Connector 27"/>
+          <p:cNvCxnSpPr/>
+          <p:nvPr/>
+        </p:nvCxnSpPr>
+        <p:spPr>
+          <a:xfrm>
+            <a:off x="3054960" y="443880"/>
+            <a:ext cx="1440" cy="4291920"/>
+          </a:xfrm>
+          <a:prstGeom prst="straightConnector1">
+            <a:avLst/>
+          </a:prstGeom>
+          <a:ln w="19050">
+            <a:solidFill>
+              <a:srgbClr val="0c7438"/>
+            </a:solidFill>
+            <a:prstDash val="sysDash"/>
+            <a:round/>
+          </a:ln>
+        </p:spPr>
+      </p:cxnSp>
+      <p:cxnSp>
+        <p:nvCxnSpPr>
+          <p:cNvPr id="33" name="Straight Connector 30"/>
+          <p:cNvCxnSpPr/>
+          <p:nvPr/>
+        </p:nvCxnSpPr>
+        <p:spPr>
+          <a:xfrm>
+            <a:off x="5330520" y="443880"/>
+            <a:ext cx="1440" cy="4200480"/>
+          </a:xfrm>
+          <a:prstGeom prst="straightConnector1">
+            <a:avLst/>
+          </a:prstGeom>
+          <a:ln w="19050">
+            <a:solidFill>
+              <a:srgbClr val="0c7438"/>
+            </a:solidFill>
+            <a:prstDash val="sysDash"/>
+            <a:round/>
+          </a:ln>
+        </p:spPr>
+      </p:cxnSp>
       <p:pic>
         <p:nvPicPr>
-          <p:cNvPr id="32" name="Picture 4" descr="A person in a suit pointing at the camera&#10;&#10;Description automatically generated"/>
+          <p:cNvPr id="34" name="Picture 2" descr="A black background with a black square&#10;&#10;Description automatically generated with medium confidence"/>
           <p:cNvPicPr/>
           <p:nvPr/>
         </p:nvPicPr>
@@ -6591,27 +6142,20 @@
         </p:blipFill>
         <p:spPr>
           <a:xfrm>
-            <a:off x="599040" y="2523240"/>
-            <a:ext cx="2081880" cy="2064600"/>
-          </a:xfrm>
-          <a:prstGeom prst="rect">
-            <a:avLst/>
-          </a:prstGeom>
-          <a:ln w="0">
-            <a:noFill/>
-          </a:ln>
-          <a:effectLst>
-            <a:outerShdw algn="tl" dir="2700000" dist="62621" rotWithShape="0">
-              <a:srgbClr val="0c7438">
-                <a:alpha val="50000"/>
-              </a:srgbClr>
-            </a:outerShdw>
-          </a:effectLst>
+            <a:off x="1302120" y="369720"/>
+            <a:ext cx="1466640" cy="516960"/>
+          </a:xfrm>
+          <a:prstGeom prst="rect">
+            <a:avLst/>
+          </a:prstGeom>
+          <a:ln w="0">
+            <a:noFill/>
+          </a:ln>
         </p:spPr>
       </p:pic>
       <p:pic>
         <p:nvPicPr>
-          <p:cNvPr id="33" name="Picture 6" descr=""/>
+          <p:cNvPr id="35" name="Picture 6" descr="A black background with a black square&#10;&#10;Description automatically generated with medium confidence"/>
           <p:cNvPicPr/>
           <p:nvPr/>
         </p:nvPicPr>
@@ -6621,22 +6165,505 @@
         </p:blipFill>
         <p:spPr>
           <a:xfrm>
-            <a:off x="2391840" y="1024560"/>
-            <a:ext cx="5853960" cy="2708280"/>
-          </a:xfrm>
-          <a:prstGeom prst="rect">
-            <a:avLst/>
-          </a:prstGeom>
-          <a:ln w="0">
-            <a:noFill/>
-          </a:ln>
-          <a:effectLst>
-            <a:outerShdw algn="tl" dir="2700000" dist="62621" rotWithShape="0">
-              <a:srgbClr val="0c7438">
-                <a:alpha val="50000"/>
-              </a:srgbClr>
-            </a:outerShdw>
-          </a:effectLst>
+            <a:off x="3342240" y="369720"/>
+            <a:ext cx="1720800" cy="516960"/>
+          </a:xfrm>
+          <a:prstGeom prst="rect">
+            <a:avLst/>
+          </a:prstGeom>
+          <a:ln w="0">
+            <a:noFill/>
+          </a:ln>
+        </p:spPr>
+      </p:pic>
+      <p:pic>
+        <p:nvPicPr>
+          <p:cNvPr id="36" name="Picture 12" descr="A black background with a black square&#10;&#10;Description automatically generated with medium confidence"/>
+          <p:cNvPicPr/>
+          <p:nvPr/>
+        </p:nvPicPr>
+        <p:blipFill>
+          <a:blip r:embed="rId3"/>
+          <a:stretch/>
+        </p:blipFill>
+        <p:spPr>
+          <a:xfrm>
+            <a:off x="5600520" y="369720"/>
+            <a:ext cx="1496880" cy="516960"/>
+          </a:xfrm>
+          <a:prstGeom prst="rect">
+            <a:avLst/>
+          </a:prstGeom>
+          <a:ln w="0">
+            <a:noFill/>
+          </a:ln>
+        </p:spPr>
+      </p:pic>
+      <p:pic>
+        <p:nvPicPr>
+          <p:cNvPr id="37" name="Picture 23" descr="A blue hexagon with black text&#10;&#10;Description automatically generated"/>
+          <p:cNvPicPr/>
+          <p:nvPr/>
+        </p:nvPicPr>
+        <p:blipFill>
+          <a:blip r:embed="rId4"/>
+          <a:stretch/>
+        </p:blipFill>
+        <p:spPr>
+          <a:xfrm>
+            <a:off x="5546160" y="2075760"/>
+            <a:ext cx="1605600" cy="1391760"/>
+          </a:xfrm>
+          <a:prstGeom prst="rect">
+            <a:avLst/>
+          </a:prstGeom>
+          <a:ln w="0">
+            <a:noFill/>
+          </a:ln>
+        </p:spPr>
+      </p:pic>
+      <p:pic>
+        <p:nvPicPr>
+          <p:cNvPr id="38" name="Picture 25" descr=""/>
+          <p:cNvPicPr/>
+          <p:nvPr/>
+        </p:nvPicPr>
+        <p:blipFill>
+          <a:blip r:embed="rId5"/>
+          <a:stretch/>
+        </p:blipFill>
+        <p:spPr>
+          <a:xfrm rot="823200">
+            <a:off x="2508120" y="1796400"/>
+            <a:ext cx="3294720" cy="478800"/>
+          </a:xfrm>
+          <a:prstGeom prst="rect">
+            <a:avLst/>
+          </a:prstGeom>
+          <a:ln w="0">
+            <a:noFill/>
+          </a:ln>
+        </p:spPr>
+      </p:pic>
+      <p:pic>
+        <p:nvPicPr>
+          <p:cNvPr id="39" name="Picture 14" descr="A black screen with white text&#10;&#10;Description automatically generated"/>
+          <p:cNvPicPr/>
+          <p:nvPr/>
+        </p:nvPicPr>
+        <p:blipFill>
+          <a:blip r:embed="rId6"/>
+          <a:stretch/>
+        </p:blipFill>
+        <p:spPr>
+          <a:xfrm>
+            <a:off x="1202760" y="866160"/>
+            <a:ext cx="1665000" cy="1665000"/>
+          </a:xfrm>
+          <a:prstGeom prst="rect">
+            <a:avLst/>
+          </a:prstGeom>
+          <a:ln w="0">
+            <a:noFill/>
+          </a:ln>
+        </p:spPr>
+      </p:pic>
+      <p:pic>
+        <p:nvPicPr>
+          <p:cNvPr id="40" name="Picture 17" descr="A black background with white text&#10;&#10;Description automatically generated"/>
+          <p:cNvPicPr/>
+          <p:nvPr/>
+        </p:nvPicPr>
+        <p:blipFill>
+          <a:blip r:embed="rId7"/>
+          <a:stretch/>
+        </p:blipFill>
+        <p:spPr>
+          <a:xfrm>
+            <a:off x="1202760" y="3006360"/>
+            <a:ext cx="1665000" cy="1656720"/>
+          </a:xfrm>
+          <a:prstGeom prst="rect">
+            <a:avLst/>
+          </a:prstGeom>
+          <a:ln w="0">
+            <a:noFill/>
+          </a:ln>
+        </p:spPr>
+      </p:pic>
+      <p:pic>
+        <p:nvPicPr>
+          <p:cNvPr id="41" name="Picture 19" descr="A yellow arrow with black text&#10;&#10;Description automatically generated"/>
+          <p:cNvPicPr/>
+          <p:nvPr/>
+        </p:nvPicPr>
+        <p:blipFill>
+          <a:blip r:embed="rId8"/>
+          <a:stretch/>
+        </p:blipFill>
+        <p:spPr>
+          <a:xfrm>
+            <a:off x="1809360" y="2385000"/>
+            <a:ext cx="451800" cy="773280"/>
+          </a:xfrm>
+          <a:prstGeom prst="rect">
+            <a:avLst/>
+          </a:prstGeom>
+          <a:ln w="0">
+            <a:noFill/>
+          </a:ln>
+        </p:spPr>
+      </p:pic>
+      <p:pic>
+        <p:nvPicPr>
+          <p:cNvPr id="42" name="Picture 21" descr="A pink sign with black text&#10;&#10;Description automatically generated"/>
+          <p:cNvPicPr/>
+          <p:nvPr/>
+        </p:nvPicPr>
+        <p:blipFill>
+          <a:blip r:embed="rId9"/>
+          <a:stretch/>
+        </p:blipFill>
+        <p:spPr>
+          <a:xfrm>
+            <a:off x="2347560" y="2185560"/>
+            <a:ext cx="558720" cy="345960"/>
+          </a:xfrm>
+          <a:prstGeom prst="rect">
+            <a:avLst/>
+          </a:prstGeom>
+          <a:ln w="0">
+            <a:noFill/>
+          </a:ln>
+        </p:spPr>
+      </p:pic>
+    </p:spTree>
+  </p:cSld>
+  <mc:AlternateContent>
+    <mc:Choice Requires="p14">
+      <p:transition spd="slow" p14:dur="2000"/>
+    </mc:Choice>
+    <mc:Fallback>
+      <p:transition spd="slow"/>
+    </mc:Fallback>
+  </mc:AlternateContent>
+</p:sld>
+</file>
+
+<file path=ppt/slides/slide9.xml><?xml version="1.0" encoding="utf-8"?>
+<p:sld xmlns:a="http://schemas.openxmlformats.org/drawingml/2006/main" xmlns:p="http://schemas.openxmlformats.org/presentationml/2006/main" xmlns:r="http://schemas.openxmlformats.org/officeDocument/2006/relationships" xmlns:p14="http://schemas.microsoft.com/office/powerpoint/2010/main" xmlns:p15="http://schemas.microsoft.com/office/powerpoint/2012/main" xmlns:mc="http://schemas.openxmlformats.org/markup-compatibility/2006">
+  <p:cSld>
+    <p:spTree>
+      <p:nvGrpSpPr>
+        <p:cNvPr id="1" name=""/>
+        <p:cNvGrpSpPr/>
+        <p:nvPr/>
+      </p:nvGrpSpPr>
+      <p:grpSpPr>
+        <a:xfrm>
+          <a:off x="0" y="0"/>
+          <a:ext cx="0" cy="0"/>
+          <a:chOff x="0" y="0"/>
+          <a:chExt cx="0" cy="0"/>
+        </a:xfrm>
+      </p:grpSpPr>
+      <p:cxnSp>
+        <p:nvCxnSpPr>
+          <p:cNvPr id="43" name="Straight Connector 27"/>
+          <p:cNvCxnSpPr/>
+          <p:nvPr/>
+        </p:nvCxnSpPr>
+        <p:spPr>
+          <a:xfrm>
+            <a:off x="3054960" y="443880"/>
+            <a:ext cx="1440" cy="4291920"/>
+          </a:xfrm>
+          <a:prstGeom prst="straightConnector1">
+            <a:avLst/>
+          </a:prstGeom>
+          <a:ln w="19050">
+            <a:solidFill>
+              <a:srgbClr val="0c7438"/>
+            </a:solidFill>
+            <a:prstDash val="sysDash"/>
+            <a:round/>
+          </a:ln>
+        </p:spPr>
+      </p:cxnSp>
+      <p:cxnSp>
+        <p:nvCxnSpPr>
+          <p:cNvPr id="44" name="Straight Connector 30"/>
+          <p:cNvCxnSpPr/>
+          <p:nvPr/>
+        </p:nvCxnSpPr>
+        <p:spPr>
+          <a:xfrm>
+            <a:off x="5330520" y="443880"/>
+            <a:ext cx="1440" cy="4200480"/>
+          </a:xfrm>
+          <a:prstGeom prst="straightConnector1">
+            <a:avLst/>
+          </a:prstGeom>
+          <a:ln w="19050">
+            <a:solidFill>
+              <a:srgbClr val="0c7438"/>
+            </a:solidFill>
+            <a:prstDash val="sysDash"/>
+            <a:round/>
+          </a:ln>
+        </p:spPr>
+      </p:cxnSp>
+      <p:pic>
+        <p:nvPicPr>
+          <p:cNvPr id="45" name="Picture 31" descr=""/>
+          <p:cNvPicPr/>
+          <p:nvPr/>
+        </p:nvPicPr>
+        <p:blipFill>
+          <a:blip r:embed="rId1"/>
+          <a:stretch/>
+        </p:blipFill>
+        <p:spPr>
+          <a:xfrm rot="20760000">
+            <a:off x="2518200" y="3313080"/>
+            <a:ext cx="3294720" cy="478800"/>
+          </a:xfrm>
+          <a:prstGeom prst="rect">
+            <a:avLst/>
+          </a:prstGeom>
+          <a:ln w="0">
+            <a:noFill/>
+          </a:ln>
+        </p:spPr>
+      </p:pic>
+      <p:pic>
+        <p:nvPicPr>
+          <p:cNvPr id="46" name="Picture 2" descr="A black background with a black square&#10;&#10;Description automatically generated with medium confidence"/>
+          <p:cNvPicPr/>
+          <p:nvPr/>
+        </p:nvPicPr>
+        <p:blipFill>
+          <a:blip r:embed="rId2"/>
+          <a:stretch/>
+        </p:blipFill>
+        <p:spPr>
+          <a:xfrm>
+            <a:off x="1302120" y="369720"/>
+            <a:ext cx="1466640" cy="516960"/>
+          </a:xfrm>
+          <a:prstGeom prst="rect">
+            <a:avLst/>
+          </a:prstGeom>
+          <a:ln w="0">
+            <a:noFill/>
+          </a:ln>
+        </p:spPr>
+      </p:pic>
+      <p:pic>
+        <p:nvPicPr>
+          <p:cNvPr id="47" name="Picture 6" descr="A black background with a black square&#10;&#10;Description automatically generated with medium confidence"/>
+          <p:cNvPicPr/>
+          <p:nvPr/>
+        </p:nvPicPr>
+        <p:blipFill>
+          <a:blip r:embed="rId3"/>
+          <a:stretch/>
+        </p:blipFill>
+        <p:spPr>
+          <a:xfrm>
+            <a:off x="3342240" y="369720"/>
+            <a:ext cx="1720800" cy="516960"/>
+          </a:xfrm>
+          <a:prstGeom prst="rect">
+            <a:avLst/>
+          </a:prstGeom>
+          <a:ln w="0">
+            <a:noFill/>
+          </a:ln>
+        </p:spPr>
+      </p:pic>
+      <p:pic>
+        <p:nvPicPr>
+          <p:cNvPr id="48" name="Picture 12" descr="A black background with a black square&#10;&#10;Description automatically generated with medium confidence"/>
+          <p:cNvPicPr/>
+          <p:nvPr/>
+        </p:nvPicPr>
+        <p:blipFill>
+          <a:blip r:embed="rId4"/>
+          <a:stretch/>
+        </p:blipFill>
+        <p:spPr>
+          <a:xfrm>
+            <a:off x="5600520" y="369720"/>
+            <a:ext cx="1496880" cy="516960"/>
+          </a:xfrm>
+          <a:prstGeom prst="rect">
+            <a:avLst/>
+          </a:prstGeom>
+          <a:ln w="0">
+            <a:noFill/>
+          </a:ln>
+        </p:spPr>
+      </p:pic>
+      <p:pic>
+        <p:nvPicPr>
+          <p:cNvPr id="49" name="Picture 23" descr="A blue hexagon with black text&#10;&#10;Description automatically generated"/>
+          <p:cNvPicPr/>
+          <p:nvPr/>
+        </p:nvPicPr>
+        <p:blipFill>
+          <a:blip r:embed="rId5"/>
+          <a:stretch/>
+        </p:blipFill>
+        <p:spPr>
+          <a:xfrm>
+            <a:off x="5546160" y="2075760"/>
+            <a:ext cx="1605600" cy="1391760"/>
+          </a:xfrm>
+          <a:prstGeom prst="rect">
+            <a:avLst/>
+          </a:prstGeom>
+          <a:ln w="0">
+            <a:noFill/>
+          </a:ln>
+        </p:spPr>
+      </p:pic>
+      <p:pic>
+        <p:nvPicPr>
+          <p:cNvPr id="50" name="Picture 25" descr=""/>
+          <p:cNvPicPr/>
+          <p:nvPr/>
+        </p:nvPicPr>
+        <p:blipFill>
+          <a:blip r:embed="rId6"/>
+          <a:stretch/>
+        </p:blipFill>
+        <p:spPr>
+          <a:xfrm rot="823200">
+            <a:off x="2508120" y="1796400"/>
+            <a:ext cx="3294720" cy="478800"/>
+          </a:xfrm>
+          <a:prstGeom prst="rect">
+            <a:avLst/>
+          </a:prstGeom>
+          <a:ln w="0">
+            <a:noFill/>
+          </a:ln>
+        </p:spPr>
+      </p:pic>
+      <p:pic>
+        <p:nvPicPr>
+          <p:cNvPr id="51" name="Picture 14" descr="A black screen with white text&#10;&#10;Description automatically generated"/>
+          <p:cNvPicPr/>
+          <p:nvPr/>
+        </p:nvPicPr>
+        <p:blipFill>
+          <a:blip r:embed="rId7"/>
+          <a:stretch/>
+        </p:blipFill>
+        <p:spPr>
+          <a:xfrm>
+            <a:off x="1202760" y="866160"/>
+            <a:ext cx="1665000" cy="1665000"/>
+          </a:xfrm>
+          <a:prstGeom prst="rect">
+            <a:avLst/>
+          </a:prstGeom>
+          <a:ln w="0">
+            <a:noFill/>
+          </a:ln>
+        </p:spPr>
+      </p:pic>
+      <p:pic>
+        <p:nvPicPr>
+          <p:cNvPr id="52" name="Picture 17" descr="A black background with white text&#10;&#10;Description automatically generated"/>
+          <p:cNvPicPr/>
+          <p:nvPr/>
+        </p:nvPicPr>
+        <p:blipFill>
+          <a:blip r:embed="rId8"/>
+          <a:stretch/>
+        </p:blipFill>
+        <p:spPr>
+          <a:xfrm>
+            <a:off x="1202760" y="3006360"/>
+            <a:ext cx="1665000" cy="1656720"/>
+          </a:xfrm>
+          <a:prstGeom prst="rect">
+            <a:avLst/>
+          </a:prstGeom>
+          <a:ln w="0">
+            <a:noFill/>
+          </a:ln>
+        </p:spPr>
+      </p:pic>
+      <p:pic>
+        <p:nvPicPr>
+          <p:cNvPr id="53" name="Picture 19" descr="A yellow arrow with black text&#10;&#10;Description automatically generated"/>
+          <p:cNvPicPr/>
+          <p:nvPr/>
+        </p:nvPicPr>
+        <p:blipFill>
+          <a:blip r:embed="rId9"/>
+          <a:stretch/>
+        </p:blipFill>
+        <p:spPr>
+          <a:xfrm>
+            <a:off x="1809360" y="2385000"/>
+            <a:ext cx="451800" cy="773280"/>
+          </a:xfrm>
+          <a:prstGeom prst="rect">
+            <a:avLst/>
+          </a:prstGeom>
+          <a:ln w="0">
+            <a:noFill/>
+          </a:ln>
+        </p:spPr>
+      </p:pic>
+      <p:pic>
+        <p:nvPicPr>
+          <p:cNvPr id="54" name="Picture 21" descr="A pink sign with black text&#10;&#10;Description automatically generated"/>
+          <p:cNvPicPr/>
+          <p:nvPr/>
+        </p:nvPicPr>
+        <p:blipFill>
+          <a:blip r:embed="rId10"/>
+          <a:stretch/>
+        </p:blipFill>
+        <p:spPr>
+          <a:xfrm>
+            <a:off x="2347560" y="2185560"/>
+            <a:ext cx="558720" cy="345960"/>
+          </a:xfrm>
+          <a:prstGeom prst="rect">
+            <a:avLst/>
+          </a:prstGeom>
+          <a:ln w="0">
+            <a:noFill/>
+          </a:ln>
+        </p:spPr>
+      </p:pic>
+      <p:pic>
+        <p:nvPicPr>
+          <p:cNvPr id="55" name="Picture 28" descr="A pink sign with black text&#10;&#10;Description automatically generated"/>
+          <p:cNvPicPr/>
+          <p:nvPr/>
+        </p:nvPicPr>
+        <p:blipFill>
+          <a:blip r:embed="rId11"/>
+          <a:stretch/>
+        </p:blipFill>
+        <p:spPr>
+          <a:xfrm>
+            <a:off x="2347560" y="4323960"/>
+            <a:ext cx="558720" cy="345960"/>
+          </a:xfrm>
+          <a:prstGeom prst="rect">
+            <a:avLst/>
+          </a:prstGeom>
+          <a:ln w="0">
+            <a:noFill/>
+          </a:ln>
         </p:spPr>
       </p:pic>
     </p:spTree>
@@ -6670,7 +6697,7 @@
                             </p:stCondLst>
                             <p:childTnLst>
                               <p:par>
-                                <p:cTn id="136" nodeType="withEffect" fill="hold" presetClass="entr" presetID="2" presetSubtype="4">
+                                <p:cTn id="136" nodeType="afterEffect" fill="hold" presetClass="entr" presetID="2" presetSubtype="4">
                                   <p:stCondLst>
                                     <p:cond delay="0"/>
                                   </p:stCondLst>
@@ -6683,7 +6710,7 @@
                                           </p:stCondLst>
                                         </p:cTn>
                                         <p:tgtEl>
-                                          <p:spTgt spid="32"/>
+                                          <p:spTgt spid="55"/>
                                         </p:tgtEl>
                                         <p:attrNameLst>
                                           <p:attrName>style.visibility</p:attrName>
@@ -6695,9 +6722,9 @@
                                     </p:set>
                                     <p:anim calcmode="lin" valueType="num">
                                       <p:cBhvr additive="repl">
-                                        <p:cTn id="138" dur="1000" fill="hold"/>
-                                        <p:tgtEl>
-                                          <p:spTgt spid="32"/>
+                                        <p:cTn id="138" dur="500" fill="hold"/>
+                                        <p:tgtEl>
+                                          <p:spTgt spid="55"/>
                                         </p:tgtEl>
                                         <p:attrNameLst>
                                           <p:attrName>ppt_x</p:attrName>
@@ -6718,9 +6745,9 @@
                                     </p:anim>
                                     <p:anim calcmode="lin" valueType="num">
                                       <p:cBhvr additive="repl">
-                                        <p:cTn id="139" dur="1000" fill="hold"/>
-                                        <p:tgtEl>
-                                          <p:spTgt spid="32"/>
+                                        <p:cTn id="139" dur="500" fill="hold"/>
+                                        <p:tgtEl>
+                                          <p:spTgt spid="55"/>
                                         </p:tgtEl>
                                         <p:attrNameLst>
                                           <p:attrName>ppt_y</p:attrName>
@@ -6742,21 +6769,30 @@
                                   </p:childTnLst>
                                 </p:cTn>
                               </p:par>
+                            </p:childTnLst>
+                          </p:cTn>
+                        </p:par>
+                        <p:par>
+                          <p:cTn id="140" fill="hold">
+                            <p:stCondLst>
+                              <p:cond delay="500"/>
+                            </p:stCondLst>
+                            <p:childTnLst>
                               <p:par>
-                                <p:cTn id="140" nodeType="withEffect" fill="hold" presetClass="entr" presetID="2" presetSubtype="1">
+                                <p:cTn id="141" nodeType="afterEffect" fill="hold" presetClass="entr" presetID="10">
                                   <p:stCondLst>
                                     <p:cond delay="0"/>
                                   </p:stCondLst>
                                   <p:childTnLst>
                                     <p:set>
                                       <p:cBhvr>
-                                        <p:cTn id="141" dur="1" fill="hold">
+                                        <p:cTn id="142" dur="1" fill="hold">
                                           <p:stCondLst>
                                             <p:cond delay="0"/>
                                           </p:stCondLst>
                                         </p:cTn>
                                         <p:tgtEl>
-                                          <p:spTgt spid="33"/>
+                                          <p:spTgt spid="45"/>
                                         </p:tgtEl>
                                         <p:attrNameLst>
                                           <p:attrName>style.visibility</p:attrName>
@@ -6766,52 +6802,14 @@
                                         <p:strVal val="visible"/>
                                       </p:to>
                                     </p:set>
-                                    <p:anim calcmode="lin" valueType="num">
+                                    <p:animEffect filter="fade" transition="in">
                                       <p:cBhvr additive="repl">
-                                        <p:cTn id="142" dur="1000" fill="hold"/>
-                                        <p:tgtEl>
-                                          <p:spTgt spid="33"/>
-                                        </p:tgtEl>
-                                        <p:attrNameLst>
-                                          <p:attrName>ppt_x</p:attrName>
-                                        </p:attrNameLst>
-                                      </p:cBhvr>
-                                      <p:tavLst>
-                                        <p:tav tm="0">
-                                          <p:val>
-                                            <p:strVal val="#ppt_x"/>
-                                          </p:val>
-                                        </p:tav>
-                                        <p:tav tm="100000">
-                                          <p:val>
-                                            <p:strVal val="#ppt_x"/>
-                                          </p:val>
-                                        </p:tav>
-                                      </p:tavLst>
-                                    </p:anim>
-                                    <p:anim calcmode="lin" valueType="num">
-                                      <p:cBhvr additive="repl">
-                                        <p:cTn id="143" dur="1000" fill="hold"/>
-                                        <p:tgtEl>
-                                          <p:spTgt spid="33"/>
-                                        </p:tgtEl>
-                                        <p:attrNameLst>
-                                          <p:attrName>ppt_y</p:attrName>
-                                        </p:attrNameLst>
-                                      </p:cBhvr>
-                                      <p:tavLst>
-                                        <p:tav tm="0">
-                                          <p:val>
-                                            <p:strVal val="0-#ppt_h/2"/>
-                                          </p:val>
-                                        </p:tav>
-                                        <p:tav tm="100000">
-                                          <p:val>
-                                            <p:strVal val="#ppt_y"/>
-                                          </p:val>
-                                        </p:tav>
-                                      </p:tavLst>
-                                    </p:anim>
+                                        <p:cTn id="143" dur="500"/>
+                                        <p:tgtEl>
+                                          <p:spTgt spid="45"/>
+                                        </p:tgtEl>
+                                      </p:cBhvr>
+                                    </p:animEffect>
                                   </p:childTnLst>
                                 </p:cTn>
                               </p:par>
@@ -6843,289 +6841,6 @@
       </p:par>
     </p:tnLst>
   </p:timing>
-</p:sld>
-</file>
-
-<file path=ppt/slides/slide9.xml><?xml version="1.0" encoding="utf-8"?>
-<p:sld xmlns:a="http://schemas.openxmlformats.org/drawingml/2006/main" xmlns:p="http://schemas.openxmlformats.org/presentationml/2006/main" xmlns:r="http://schemas.openxmlformats.org/officeDocument/2006/relationships" xmlns:p14="http://schemas.microsoft.com/office/powerpoint/2010/main" xmlns:p15="http://schemas.microsoft.com/office/powerpoint/2012/main" xmlns:mc="http://schemas.openxmlformats.org/markup-compatibility/2006">
-  <p:cSld>
-    <p:spTree>
-      <p:nvGrpSpPr>
-        <p:cNvPr id="1" name=""/>
-        <p:cNvGrpSpPr/>
-        <p:nvPr/>
-      </p:nvGrpSpPr>
-      <p:grpSpPr>
-        <a:xfrm>
-          <a:off x="0" y="0"/>
-          <a:ext cx="0" cy="0"/>
-          <a:chOff x="0" y="0"/>
-          <a:chExt cx="0" cy="0"/>
-        </a:xfrm>
-      </p:grpSpPr>
-      <p:cxnSp>
-        <p:nvCxnSpPr>
-          <p:cNvPr id="34" name="Straight Connector 27"/>
-          <p:cNvCxnSpPr/>
-          <p:nvPr/>
-        </p:nvCxnSpPr>
-        <p:spPr>
-          <a:xfrm>
-            <a:off x="3054960" y="443880"/>
-            <a:ext cx="720" cy="4291200"/>
-          </a:xfrm>
-          <a:prstGeom prst="straightConnector1">
-            <a:avLst/>
-          </a:prstGeom>
-          <a:ln w="19050">
-            <a:solidFill>
-              <a:srgbClr val="0c7438"/>
-            </a:solidFill>
-            <a:prstDash val="sysDash"/>
-            <a:round/>
-          </a:ln>
-        </p:spPr>
-      </p:cxnSp>
-      <p:cxnSp>
-        <p:nvCxnSpPr>
-          <p:cNvPr id="35" name="Straight Connector 30"/>
-          <p:cNvCxnSpPr/>
-          <p:nvPr/>
-        </p:nvCxnSpPr>
-        <p:spPr>
-          <a:xfrm>
-            <a:off x="5330520" y="443880"/>
-            <a:ext cx="720" cy="4199760"/>
-          </a:xfrm>
-          <a:prstGeom prst="straightConnector1">
-            <a:avLst/>
-          </a:prstGeom>
-          <a:ln w="19050">
-            <a:solidFill>
-              <a:srgbClr val="0c7438"/>
-            </a:solidFill>
-            <a:prstDash val="sysDash"/>
-            <a:round/>
-          </a:ln>
-        </p:spPr>
-      </p:cxnSp>
-      <p:pic>
-        <p:nvPicPr>
-          <p:cNvPr id="36" name="Picture 2" descr="A black background with a black square&#10;&#10;Description automatically generated with medium confidence"/>
-          <p:cNvPicPr/>
-          <p:nvPr/>
-        </p:nvPicPr>
-        <p:blipFill>
-          <a:blip r:embed="rId1"/>
-          <a:stretch/>
-        </p:blipFill>
-        <p:spPr>
-          <a:xfrm>
-            <a:off x="1302120" y="369720"/>
-            <a:ext cx="1467360" cy="517680"/>
-          </a:xfrm>
-          <a:prstGeom prst="rect">
-            <a:avLst/>
-          </a:prstGeom>
-          <a:ln w="0">
-            <a:noFill/>
-          </a:ln>
-        </p:spPr>
-      </p:pic>
-      <p:pic>
-        <p:nvPicPr>
-          <p:cNvPr id="37" name="Picture 6" descr="A black background with a black square&#10;&#10;Description automatically generated with medium confidence"/>
-          <p:cNvPicPr/>
-          <p:nvPr/>
-        </p:nvPicPr>
-        <p:blipFill>
-          <a:blip r:embed="rId2"/>
-          <a:stretch/>
-        </p:blipFill>
-        <p:spPr>
-          <a:xfrm>
-            <a:off x="3342240" y="369720"/>
-            <a:ext cx="1721520" cy="517680"/>
-          </a:xfrm>
-          <a:prstGeom prst="rect">
-            <a:avLst/>
-          </a:prstGeom>
-          <a:ln w="0">
-            <a:noFill/>
-          </a:ln>
-        </p:spPr>
-      </p:pic>
-      <p:pic>
-        <p:nvPicPr>
-          <p:cNvPr id="38" name="Picture 12" descr="A black background with a black square&#10;&#10;Description automatically generated with medium confidence"/>
-          <p:cNvPicPr/>
-          <p:nvPr/>
-        </p:nvPicPr>
-        <p:blipFill>
-          <a:blip r:embed="rId3"/>
-          <a:stretch/>
-        </p:blipFill>
-        <p:spPr>
-          <a:xfrm>
-            <a:off x="5600520" y="369720"/>
-            <a:ext cx="1497600" cy="517680"/>
-          </a:xfrm>
-          <a:prstGeom prst="rect">
-            <a:avLst/>
-          </a:prstGeom>
-          <a:ln w="0">
-            <a:noFill/>
-          </a:ln>
-        </p:spPr>
-      </p:pic>
-      <p:pic>
-        <p:nvPicPr>
-          <p:cNvPr id="39" name="Picture 23" descr="A blue hexagon with black text&#10;&#10;Description automatically generated"/>
-          <p:cNvPicPr/>
-          <p:nvPr/>
-        </p:nvPicPr>
-        <p:blipFill>
-          <a:blip r:embed="rId4"/>
-          <a:stretch/>
-        </p:blipFill>
-        <p:spPr>
-          <a:xfrm>
-            <a:off x="5546160" y="2075760"/>
-            <a:ext cx="1606320" cy="1392480"/>
-          </a:xfrm>
-          <a:prstGeom prst="rect">
-            <a:avLst/>
-          </a:prstGeom>
-          <a:ln w="0">
-            <a:noFill/>
-          </a:ln>
-        </p:spPr>
-      </p:pic>
-      <p:pic>
-        <p:nvPicPr>
-          <p:cNvPr id="40" name="Picture 25" descr=""/>
-          <p:cNvPicPr/>
-          <p:nvPr/>
-        </p:nvPicPr>
-        <p:blipFill>
-          <a:blip r:embed="rId5"/>
-          <a:stretch/>
-        </p:blipFill>
-        <p:spPr>
-          <a:xfrm rot="823200">
-            <a:off x="2508480" y="1796760"/>
-            <a:ext cx="3295440" cy="479520"/>
-          </a:xfrm>
-          <a:prstGeom prst="rect">
-            <a:avLst/>
-          </a:prstGeom>
-          <a:ln w="0">
-            <a:noFill/>
-          </a:ln>
-        </p:spPr>
-      </p:pic>
-      <p:pic>
-        <p:nvPicPr>
-          <p:cNvPr id="41" name="Picture 14" descr="A black screen with white text&#10;&#10;Description automatically generated"/>
-          <p:cNvPicPr/>
-          <p:nvPr/>
-        </p:nvPicPr>
-        <p:blipFill>
-          <a:blip r:embed="rId6"/>
-          <a:stretch/>
-        </p:blipFill>
-        <p:spPr>
-          <a:xfrm>
-            <a:off x="1202760" y="866160"/>
-            <a:ext cx="1665720" cy="1665720"/>
-          </a:xfrm>
-          <a:prstGeom prst="rect">
-            <a:avLst/>
-          </a:prstGeom>
-          <a:ln w="0">
-            <a:noFill/>
-          </a:ln>
-        </p:spPr>
-      </p:pic>
-      <p:pic>
-        <p:nvPicPr>
-          <p:cNvPr id="42" name="Picture 17" descr="A black background with white text&#10;&#10;Description automatically generated"/>
-          <p:cNvPicPr/>
-          <p:nvPr/>
-        </p:nvPicPr>
-        <p:blipFill>
-          <a:blip r:embed="rId7"/>
-          <a:stretch/>
-        </p:blipFill>
-        <p:spPr>
-          <a:xfrm>
-            <a:off x="1202760" y="3006360"/>
-            <a:ext cx="1665720" cy="1657440"/>
-          </a:xfrm>
-          <a:prstGeom prst="rect">
-            <a:avLst/>
-          </a:prstGeom>
-          <a:ln w="0">
-            <a:noFill/>
-          </a:ln>
-        </p:spPr>
-      </p:pic>
-      <p:pic>
-        <p:nvPicPr>
-          <p:cNvPr id="43" name="Picture 19" descr="A yellow arrow with black text&#10;&#10;Description automatically generated"/>
-          <p:cNvPicPr/>
-          <p:nvPr/>
-        </p:nvPicPr>
-        <p:blipFill>
-          <a:blip r:embed="rId8"/>
-          <a:stretch/>
-        </p:blipFill>
-        <p:spPr>
-          <a:xfrm>
-            <a:off x="1809360" y="2385000"/>
-            <a:ext cx="452520" cy="774000"/>
-          </a:xfrm>
-          <a:prstGeom prst="rect">
-            <a:avLst/>
-          </a:prstGeom>
-          <a:ln w="0">
-            <a:noFill/>
-          </a:ln>
-        </p:spPr>
-      </p:pic>
-      <p:pic>
-        <p:nvPicPr>
-          <p:cNvPr id="44" name="Picture 21" descr="A pink sign with black text&#10;&#10;Description automatically generated"/>
-          <p:cNvPicPr/>
-          <p:nvPr/>
-        </p:nvPicPr>
-        <p:blipFill>
-          <a:blip r:embed="rId9"/>
-          <a:stretch/>
-        </p:blipFill>
-        <p:spPr>
-          <a:xfrm>
-            <a:off x="2347560" y="2185560"/>
-            <a:ext cx="559440" cy="346680"/>
-          </a:xfrm>
-          <a:prstGeom prst="rect">
-            <a:avLst/>
-          </a:prstGeom>
-          <a:ln w="0">
-            <a:noFill/>
-          </a:ln>
-        </p:spPr>
-      </p:pic>
-    </p:spTree>
-  </p:cSld>
-  <mc:AlternateContent>
-    <mc:Choice Requires="p14">
-      <p:transition spd="slow" p14:dur="2000"/>
-    </mc:Choice>
-    <mc:Fallback>
-      <p:transition spd="slow"/>
-    </mc:Fallback>
-  </mc:AlternateContent>
 </p:sld>
 </file>
 
